--- a/slides/CSC336-Lecture-13-DOM-Manipulation-and-Events.pptx
+++ b/slides/CSC336-Lecture-13-DOM-Manipulation-and-Events.pptx
@@ -3192,79 +3192,44 @@
       </p:sp>
       <p:sp>
         <p:nvSpPr>
-          <p:cNvPr id="6" name="Text 4"/>
-          <p:cNvSpPr txBox="1"/>
-          <p:nvPr/>
-        </p:nvSpPr>
-        <p:spPr>
-          <a:xfrm>
-            <a:off x="640080" y="6446520"/>
-            <a:ext cx="8686800" cy="292608"/>
-          </a:xfrm>
-          <a:prstGeom prst="rect">
-            <a:avLst/>
-          </a:prstGeom>
-          <a:noFill/>
-          <a:ln/>
-        </p:spPr>
-        <p:txBody>
-          <a:bodyPr wrap="square" lIns="0" tIns="0" rIns="0" bIns="0" rtlCol="0" anchor="ctr"/>
-          <a:lstStyle/>
-          <a:p>
-            <a:pPr algn="l" indent="0" marL="0">
-              <a:buNone/>
-            </a:pPr>
-            <a:r>
-              <a:rPr lang="en-US" sz="900" dirty="0">
-                <a:solidFill>
-                  <a:srgbClr val="9AA3D8"/>
-                </a:solidFill>
-                <a:latin typeface="Calibri" pitchFamily="34" charset="0"/>
-                <a:ea typeface="Calibri" pitchFamily="34" charset="-122"/>
-                <a:cs typeface="Calibri" pitchFamily="34" charset="-120"/>
-              </a:rPr>
-              <a:t>Usman Akram  •  COMSATS University Islamabad</a:t>
-            </a:r>
-            <a:endParaRPr lang="en-US" sz="900" dirty="0"/>
-          </a:p>
-        </p:txBody>
-      </p:sp>
-      <p:sp>
-        <p:nvSpPr>
-          <p:cNvPr id="7" name="Text 5"/>
-          <p:cNvSpPr txBox="1"/>
-          <p:nvPr/>
-        </p:nvSpPr>
-        <p:spPr>
-          <a:xfrm>
-            <a:off x="11155680" y="6446520"/>
-            <a:ext cx="457200" cy="292608"/>
-          </a:xfrm>
-          <a:prstGeom prst="rect">
-            <a:avLst/>
-          </a:prstGeom>
-          <a:noFill/>
-          <a:ln/>
-        </p:spPr>
-        <p:txBody>
-          <a:bodyPr wrap="square" lIns="0" tIns="0" rIns="0" bIns="0" rtlCol="0" anchor="ctr"/>
-          <a:lstStyle/>
-          <a:p>
-            <a:pPr algn="r" indent="0" marL="0">
-              <a:buNone/>
-            </a:pPr>
-            <a:r>
-              <a:rPr lang="en-US" sz="900" dirty="0">
-                <a:solidFill>
-                  <a:srgbClr val="9AA3D8"/>
-                </a:solidFill>
-                <a:latin typeface="Calibri" pitchFamily="34" charset="0"/>
-                <a:ea typeface="Calibri" pitchFamily="34" charset="-122"/>
-                <a:cs typeface="Calibri" pitchFamily="34" charset="-120"/>
-              </a:rPr>
-              <a:t>1</a:t>
-            </a:r>
-            <a:endParaRPr lang="en-US" sz="900" dirty="0"/>
+          <p:cNvPr id="8" name="cuinotes-footer-mark"/>
+          <p:cNvSpPr txBox="1"/>
+          <p:nvPr/>
+        </p:nvSpPr>
+        <p:spPr>
+          <a:xfrm>
+            <a:off x="9951720" y="6455664"/>
+            <a:ext cx="2011680" cy="292608"/>
+          </a:xfrm>
+          <a:prstGeom prst="rect">
+            <a:avLst/>
+          </a:prstGeom>
+          <a:noFill/>
+        </p:spPr>
+        <p:txBody>
+          <a:bodyPr wrap="none" lIns="0" rIns="0" tIns="0" bIns="0">
+            <a:spAutoFit/>
+          </a:bodyPr>
+          <a:lstStyle/>
+          <a:p>
+            <a:pPr algn="r"/>
+            <a:r>
+              <a:rPr sz="1000">
+                <a:solidFill>
+                  <a:srgbClr val="8A939B"/>
+                </a:solidFill>
+                <a:hlinkClick r:id="rId3"/>
+              </a:rPr>
+              <a:t>cuinotes.com</a:t>
+            </a:r>
+            <a:r>
+              <a:rPr sz="1000">
+                <a:solidFill>
+                  <a:srgbClr val="8A939B"/>
+                </a:solidFill>
+              </a:rPr>
+              <a:t>  ·  1</a:t>
+            </a:r>
           </a:p>
         </p:txBody>
       </p:sp>
@@ -3399,6 +3364,10 @@
           </a:solidFill>
           <a:ln/>
         </p:spPr>
+        <p:txBody>
+          <a:bodyPr/>
+          <a:p/>
+        </p:txBody>
       </p:sp>
       <p:sp>
         <p:nvSpPr>
@@ -3573,79 +3542,44 @@
       </p:sp>
       <p:sp>
         <p:nvSpPr>
-          <p:cNvPr id="6" name="Text 4"/>
-          <p:cNvSpPr txBox="1"/>
-          <p:nvPr/>
-        </p:nvSpPr>
-        <p:spPr>
-          <a:xfrm>
-            <a:off x="640080" y="6446520"/>
-            <a:ext cx="8686800" cy="292608"/>
-          </a:xfrm>
-          <a:prstGeom prst="rect">
-            <a:avLst/>
-          </a:prstGeom>
-          <a:noFill/>
-          <a:ln/>
-        </p:spPr>
-        <p:txBody>
-          <a:bodyPr wrap="square" lIns="0" tIns="0" rIns="0" bIns="0" rtlCol="0" anchor="ctr"/>
-          <a:lstStyle/>
-          <a:p>
-            <a:pPr algn="l" indent="0" marL="0">
-              <a:buNone/>
-            </a:pPr>
-            <a:r>
-              <a:rPr lang="en-US" sz="900" dirty="0">
-                <a:solidFill>
-                  <a:srgbClr val="5D5D72"/>
-                </a:solidFill>
-                <a:latin typeface="Calibri" pitchFamily="34" charset="0"/>
-                <a:ea typeface="Calibri" pitchFamily="34" charset="-122"/>
-                <a:cs typeface="Calibri" pitchFamily="34" charset="-120"/>
-              </a:rPr>
-              <a:t>Usman Akram  •  COMSATS University Islamabad</a:t>
-            </a:r>
-            <a:endParaRPr lang="en-US" sz="900" dirty="0"/>
-          </a:p>
-        </p:txBody>
-      </p:sp>
-      <p:sp>
-        <p:nvSpPr>
-          <p:cNvPr id="7" name="Text 5"/>
-          <p:cNvSpPr txBox="1"/>
-          <p:nvPr/>
-        </p:nvSpPr>
-        <p:spPr>
-          <a:xfrm>
-            <a:off x="11155680" y="6446520"/>
-            <a:ext cx="457200" cy="292608"/>
-          </a:xfrm>
-          <a:prstGeom prst="rect">
-            <a:avLst/>
-          </a:prstGeom>
-          <a:noFill/>
-          <a:ln/>
-        </p:spPr>
-        <p:txBody>
-          <a:bodyPr wrap="square" lIns="0" tIns="0" rIns="0" bIns="0" rtlCol="0" anchor="ctr"/>
-          <a:lstStyle/>
-          <a:p>
-            <a:pPr algn="r" indent="0" marL="0">
-              <a:buNone/>
-            </a:pPr>
-            <a:r>
-              <a:rPr lang="en-US" sz="900" dirty="0">
-                <a:solidFill>
-                  <a:srgbClr val="5D5D72"/>
-                </a:solidFill>
-                <a:latin typeface="Calibri" pitchFamily="34" charset="0"/>
-                <a:ea typeface="Calibri" pitchFamily="34" charset="-122"/>
-                <a:cs typeface="Calibri" pitchFamily="34" charset="-120"/>
-              </a:rPr>
-              <a:t>10</a:t>
-            </a:r>
-            <a:endParaRPr lang="en-US" sz="900" dirty="0"/>
+          <p:cNvPr id="8" name="cuinotes-footer-mark"/>
+          <p:cNvSpPr txBox="1"/>
+          <p:nvPr/>
+        </p:nvSpPr>
+        <p:spPr>
+          <a:xfrm>
+            <a:off x="9951720" y="6455664"/>
+            <a:ext cx="2011680" cy="292608"/>
+          </a:xfrm>
+          <a:prstGeom prst="rect">
+            <a:avLst/>
+          </a:prstGeom>
+          <a:noFill/>
+        </p:spPr>
+        <p:txBody>
+          <a:bodyPr wrap="none" lIns="0" rIns="0" tIns="0" bIns="0">
+            <a:spAutoFit/>
+          </a:bodyPr>
+          <a:lstStyle/>
+          <a:p>
+            <a:pPr algn="r"/>
+            <a:r>
+              <a:rPr sz="1000">
+                <a:solidFill>
+                  <a:srgbClr val="8A939B"/>
+                </a:solidFill>
+                <a:hlinkClick r:id="rId3"/>
+              </a:rPr>
+              <a:t>cuinotes.com</a:t>
+            </a:r>
+            <a:r>
+              <a:rPr sz="1000">
+                <a:solidFill>
+                  <a:srgbClr val="8A939B"/>
+                </a:solidFill>
+              </a:rPr>
+              <a:t>  ·  10</a:t>
+            </a:r>
           </a:p>
         </p:txBody>
       </p:sp>
@@ -3785,6 +3719,10 @@
             <a:prstDash val="solid"/>
           </a:ln>
         </p:spPr>
+        <p:txBody>
+          <a:bodyPr/>
+          <a:p/>
+        </p:txBody>
       </p:sp>
       <p:sp>
         <p:nvSpPr>
@@ -3866,79 +3804,44 @@
       </p:sp>
       <p:sp>
         <p:nvSpPr>
-          <p:cNvPr id="7" name="Text 5"/>
-          <p:cNvSpPr txBox="1"/>
-          <p:nvPr/>
-        </p:nvSpPr>
-        <p:spPr>
-          <a:xfrm>
-            <a:off x="640080" y="6446520"/>
-            <a:ext cx="8686800" cy="292608"/>
-          </a:xfrm>
-          <a:prstGeom prst="rect">
-            <a:avLst/>
-          </a:prstGeom>
-          <a:noFill/>
-          <a:ln/>
-        </p:spPr>
-        <p:txBody>
-          <a:bodyPr wrap="square" lIns="0" tIns="0" rIns="0" bIns="0" rtlCol="0" anchor="ctr"/>
-          <a:lstStyle/>
-          <a:p>
-            <a:pPr algn="l" indent="0" marL="0">
-              <a:buNone/>
-            </a:pPr>
-            <a:r>
-              <a:rPr lang="en-US" sz="900" dirty="0">
-                <a:solidFill>
-                  <a:srgbClr val="5D5D72"/>
-                </a:solidFill>
-                <a:latin typeface="Calibri" pitchFamily="34" charset="0"/>
-                <a:ea typeface="Calibri" pitchFamily="34" charset="-122"/>
-                <a:cs typeface="Calibri" pitchFamily="34" charset="-120"/>
-              </a:rPr>
-              <a:t>Usman Akram  •  COMSATS University Islamabad</a:t>
-            </a:r>
-            <a:endParaRPr lang="en-US" sz="900" dirty="0"/>
-          </a:p>
-        </p:txBody>
-      </p:sp>
-      <p:sp>
-        <p:nvSpPr>
-          <p:cNvPr id="8" name="Text 6"/>
-          <p:cNvSpPr txBox="1"/>
-          <p:nvPr/>
-        </p:nvSpPr>
-        <p:spPr>
-          <a:xfrm>
-            <a:off x="11155680" y="6446520"/>
-            <a:ext cx="457200" cy="292608"/>
-          </a:xfrm>
-          <a:prstGeom prst="rect">
-            <a:avLst/>
-          </a:prstGeom>
-          <a:noFill/>
-          <a:ln/>
-        </p:spPr>
-        <p:txBody>
-          <a:bodyPr wrap="square" lIns="0" tIns="0" rIns="0" bIns="0" rtlCol="0" anchor="ctr"/>
-          <a:lstStyle/>
-          <a:p>
-            <a:pPr algn="r" indent="0" marL="0">
-              <a:buNone/>
-            </a:pPr>
-            <a:r>
-              <a:rPr lang="en-US" sz="900" dirty="0">
-                <a:solidFill>
-                  <a:srgbClr val="5D5D72"/>
-                </a:solidFill>
-                <a:latin typeface="Calibri" pitchFamily="34" charset="0"/>
-                <a:ea typeface="Calibri" pitchFamily="34" charset="-122"/>
-                <a:cs typeface="Calibri" pitchFamily="34" charset="-120"/>
-              </a:rPr>
-              <a:t>11</a:t>
-            </a:r>
-            <a:endParaRPr lang="en-US" sz="900" dirty="0"/>
+          <p:cNvPr id="9" name="cuinotes-footer-mark"/>
+          <p:cNvSpPr txBox="1"/>
+          <p:nvPr/>
+        </p:nvSpPr>
+        <p:spPr>
+          <a:xfrm>
+            <a:off x="9951720" y="6455664"/>
+            <a:ext cx="2011680" cy="292608"/>
+          </a:xfrm>
+          <a:prstGeom prst="rect">
+            <a:avLst/>
+          </a:prstGeom>
+          <a:noFill/>
+        </p:spPr>
+        <p:txBody>
+          <a:bodyPr wrap="none" lIns="0" rIns="0" tIns="0" bIns="0">
+            <a:spAutoFit/>
+          </a:bodyPr>
+          <a:lstStyle/>
+          <a:p>
+            <a:pPr algn="r"/>
+            <a:r>
+              <a:rPr sz="1000">
+                <a:solidFill>
+                  <a:srgbClr val="8A939B"/>
+                </a:solidFill>
+                <a:hlinkClick r:id="rId3"/>
+              </a:rPr>
+              <a:t>cuinotes.com</a:t>
+            </a:r>
+            <a:r>
+              <a:rPr sz="1000">
+                <a:solidFill>
+                  <a:srgbClr val="8A939B"/>
+                </a:solidFill>
+              </a:rPr>
+              <a:t>  ·  11</a:t>
+            </a:r>
           </a:p>
         </p:txBody>
       </p:sp>
@@ -4073,6 +3976,10 @@
           </a:solidFill>
           <a:ln/>
         </p:spPr>
+        <p:txBody>
+          <a:bodyPr/>
+          <a:p/>
+        </p:txBody>
       </p:sp>
       <p:sp>
         <p:nvSpPr>
@@ -4187,79 +4094,44 @@
       </p:sp>
       <p:sp>
         <p:nvSpPr>
-          <p:cNvPr id="6" name="Text 4"/>
-          <p:cNvSpPr txBox="1"/>
-          <p:nvPr/>
-        </p:nvSpPr>
-        <p:spPr>
-          <a:xfrm>
-            <a:off x="640080" y="6446520"/>
-            <a:ext cx="8686800" cy="292608"/>
-          </a:xfrm>
-          <a:prstGeom prst="rect">
-            <a:avLst/>
-          </a:prstGeom>
-          <a:noFill/>
-          <a:ln/>
-        </p:spPr>
-        <p:txBody>
-          <a:bodyPr wrap="square" lIns="0" tIns="0" rIns="0" bIns="0" rtlCol="0" anchor="ctr"/>
-          <a:lstStyle/>
-          <a:p>
-            <a:pPr algn="l" indent="0" marL="0">
-              <a:buNone/>
-            </a:pPr>
-            <a:r>
-              <a:rPr lang="en-US" sz="900" dirty="0">
-                <a:solidFill>
-                  <a:srgbClr val="5D5D72"/>
-                </a:solidFill>
-                <a:latin typeface="Calibri" pitchFamily="34" charset="0"/>
-                <a:ea typeface="Calibri" pitchFamily="34" charset="-122"/>
-                <a:cs typeface="Calibri" pitchFamily="34" charset="-120"/>
-              </a:rPr>
-              <a:t>Usman Akram  •  COMSATS University Islamabad</a:t>
-            </a:r>
-            <a:endParaRPr lang="en-US" sz="900" dirty="0"/>
-          </a:p>
-        </p:txBody>
-      </p:sp>
-      <p:sp>
-        <p:nvSpPr>
-          <p:cNvPr id="7" name="Text 5"/>
-          <p:cNvSpPr txBox="1"/>
-          <p:nvPr/>
-        </p:nvSpPr>
-        <p:spPr>
-          <a:xfrm>
-            <a:off x="11155680" y="6446520"/>
-            <a:ext cx="457200" cy="292608"/>
-          </a:xfrm>
-          <a:prstGeom prst="rect">
-            <a:avLst/>
-          </a:prstGeom>
-          <a:noFill/>
-          <a:ln/>
-        </p:spPr>
-        <p:txBody>
-          <a:bodyPr wrap="square" lIns="0" tIns="0" rIns="0" bIns="0" rtlCol="0" anchor="ctr"/>
-          <a:lstStyle/>
-          <a:p>
-            <a:pPr algn="r" indent="0" marL="0">
-              <a:buNone/>
-            </a:pPr>
-            <a:r>
-              <a:rPr lang="en-US" sz="900" dirty="0">
-                <a:solidFill>
-                  <a:srgbClr val="5D5D72"/>
-                </a:solidFill>
-                <a:latin typeface="Calibri" pitchFamily="34" charset="0"/>
-                <a:ea typeface="Calibri" pitchFamily="34" charset="-122"/>
-                <a:cs typeface="Calibri" pitchFamily="34" charset="-120"/>
-              </a:rPr>
-              <a:t>12</a:t>
-            </a:r>
-            <a:endParaRPr lang="en-US" sz="900" dirty="0"/>
+          <p:cNvPr id="8" name="cuinotes-footer-mark"/>
+          <p:cNvSpPr txBox="1"/>
+          <p:nvPr/>
+        </p:nvSpPr>
+        <p:spPr>
+          <a:xfrm>
+            <a:off x="9951720" y="6455664"/>
+            <a:ext cx="2011680" cy="292608"/>
+          </a:xfrm>
+          <a:prstGeom prst="rect">
+            <a:avLst/>
+          </a:prstGeom>
+          <a:noFill/>
+        </p:spPr>
+        <p:txBody>
+          <a:bodyPr wrap="none" lIns="0" rIns="0" tIns="0" bIns="0">
+            <a:spAutoFit/>
+          </a:bodyPr>
+          <a:lstStyle/>
+          <a:p>
+            <a:pPr algn="r"/>
+            <a:r>
+              <a:rPr sz="1000">
+                <a:solidFill>
+                  <a:srgbClr val="8A939B"/>
+                </a:solidFill>
+                <a:hlinkClick r:id="rId3"/>
+              </a:rPr>
+              <a:t>cuinotes.com</a:t>
+            </a:r>
+            <a:r>
+              <a:rPr sz="1000">
+                <a:solidFill>
+                  <a:srgbClr val="8A939B"/>
+                </a:solidFill>
+              </a:rPr>
+              <a:t>  ·  12</a:t>
+            </a:r>
           </a:p>
         </p:txBody>
       </p:sp>
@@ -4394,6 +4266,10 @@
           </a:solidFill>
           <a:ln/>
         </p:spPr>
+        <p:txBody>
+          <a:bodyPr/>
+          <a:p/>
+        </p:txBody>
       </p:sp>
       <p:sp>
         <p:nvSpPr>
@@ -4599,6 +4475,10 @@
             </a:outerShdw>
           </a:effectLst>
         </p:spPr>
+        <p:txBody>
+          <a:bodyPr/>
+          <a:p/>
+        </p:txBody>
       </p:sp>
       <p:pic>
         <p:nvPicPr>
@@ -4626,79 +4506,44 @@
       </p:pic>
       <p:sp>
         <p:nvSpPr>
-          <p:cNvPr id="8" name="Text 5"/>
-          <p:cNvSpPr txBox="1"/>
-          <p:nvPr/>
-        </p:nvSpPr>
-        <p:spPr>
-          <a:xfrm>
-            <a:off x="640080" y="6446520"/>
-            <a:ext cx="8686800" cy="292608"/>
-          </a:xfrm>
-          <a:prstGeom prst="rect">
-            <a:avLst/>
-          </a:prstGeom>
-          <a:noFill/>
-          <a:ln/>
-        </p:spPr>
-        <p:txBody>
-          <a:bodyPr wrap="square" lIns="0" tIns="0" rIns="0" bIns="0" rtlCol="0" anchor="ctr"/>
-          <a:lstStyle/>
-          <a:p>
-            <a:pPr algn="l" indent="0" marL="0">
-              <a:buNone/>
-            </a:pPr>
-            <a:r>
-              <a:rPr lang="en-US" sz="900" dirty="0">
-                <a:solidFill>
-                  <a:srgbClr val="5D5D72"/>
-                </a:solidFill>
-                <a:latin typeface="Calibri" pitchFamily="34" charset="0"/>
-                <a:ea typeface="Calibri" pitchFamily="34" charset="-122"/>
-                <a:cs typeface="Calibri" pitchFamily="34" charset="-120"/>
-              </a:rPr>
-              <a:t>Usman Akram  •  COMSATS University Islamabad</a:t>
-            </a:r>
-            <a:endParaRPr lang="en-US" sz="900" dirty="0"/>
-          </a:p>
-        </p:txBody>
-      </p:sp>
-      <p:sp>
-        <p:nvSpPr>
-          <p:cNvPr id="9" name="Text 6"/>
-          <p:cNvSpPr txBox="1"/>
-          <p:nvPr/>
-        </p:nvSpPr>
-        <p:spPr>
-          <a:xfrm>
-            <a:off x="11155680" y="6446520"/>
-            <a:ext cx="457200" cy="292608"/>
-          </a:xfrm>
-          <a:prstGeom prst="rect">
-            <a:avLst/>
-          </a:prstGeom>
-          <a:noFill/>
-          <a:ln/>
-        </p:spPr>
-        <p:txBody>
-          <a:bodyPr wrap="square" lIns="0" tIns="0" rIns="0" bIns="0" rtlCol="0" anchor="ctr"/>
-          <a:lstStyle/>
-          <a:p>
-            <a:pPr algn="r" indent="0" marL="0">
-              <a:buNone/>
-            </a:pPr>
-            <a:r>
-              <a:rPr lang="en-US" sz="900" dirty="0">
-                <a:solidFill>
-                  <a:srgbClr val="5D5D72"/>
-                </a:solidFill>
-                <a:latin typeface="Calibri" pitchFamily="34" charset="0"/>
-                <a:ea typeface="Calibri" pitchFamily="34" charset="-122"/>
-                <a:cs typeface="Calibri" pitchFamily="34" charset="-120"/>
-              </a:rPr>
-              <a:t>13</a:t>
-            </a:r>
-            <a:endParaRPr lang="en-US" sz="900" dirty="0"/>
+          <p:cNvPr id="10" name="cuinotes-footer-mark"/>
+          <p:cNvSpPr txBox="1"/>
+          <p:nvPr/>
+        </p:nvSpPr>
+        <p:spPr>
+          <a:xfrm>
+            <a:off x="9951720" y="6455664"/>
+            <a:ext cx="2011680" cy="292608"/>
+          </a:xfrm>
+          <a:prstGeom prst="rect">
+            <a:avLst/>
+          </a:prstGeom>
+          <a:noFill/>
+        </p:spPr>
+        <p:txBody>
+          <a:bodyPr wrap="none" lIns="0" rIns="0" tIns="0" bIns="0">
+            <a:spAutoFit/>
+          </a:bodyPr>
+          <a:lstStyle/>
+          <a:p>
+            <a:pPr algn="r"/>
+            <a:r>
+              <a:rPr sz="1000">
+                <a:solidFill>
+                  <a:srgbClr val="8A939B"/>
+                </a:solidFill>
+                <a:hlinkClick r:id="rId4"/>
+              </a:rPr>
+              <a:t>cuinotes.com</a:t>
+            </a:r>
+            <a:r>
+              <a:rPr sz="1000">
+                <a:solidFill>
+                  <a:srgbClr val="8A939B"/>
+                </a:solidFill>
+              </a:rPr>
+              <a:t>  ·  13</a:t>
+            </a:r>
           </a:p>
         </p:txBody>
       </p:sp>
@@ -4833,6 +4678,10 @@
           </a:solidFill>
           <a:ln/>
         </p:spPr>
+        <p:txBody>
+          <a:bodyPr/>
+          <a:p/>
+        </p:txBody>
       </p:sp>
       <p:sp>
         <p:nvSpPr>
@@ -4957,79 +4806,44 @@
       </p:sp>
       <p:sp>
         <p:nvSpPr>
-          <p:cNvPr id="7" name="Text 5"/>
-          <p:cNvSpPr txBox="1"/>
-          <p:nvPr/>
-        </p:nvSpPr>
-        <p:spPr>
-          <a:xfrm>
-            <a:off x="640080" y="6446520"/>
-            <a:ext cx="8686800" cy="292608"/>
-          </a:xfrm>
-          <a:prstGeom prst="rect">
-            <a:avLst/>
-          </a:prstGeom>
-          <a:noFill/>
-          <a:ln/>
-        </p:spPr>
-        <p:txBody>
-          <a:bodyPr wrap="square" lIns="0" tIns="0" rIns="0" bIns="0" rtlCol="0" anchor="ctr"/>
-          <a:lstStyle/>
-          <a:p>
-            <a:pPr algn="l" indent="0" marL="0">
-              <a:buNone/>
-            </a:pPr>
-            <a:r>
-              <a:rPr lang="en-US" sz="900" dirty="0">
-                <a:solidFill>
-                  <a:srgbClr val="5D5D72"/>
-                </a:solidFill>
-                <a:latin typeface="Calibri" pitchFamily="34" charset="0"/>
-                <a:ea typeface="Calibri" pitchFamily="34" charset="-122"/>
-                <a:cs typeface="Calibri" pitchFamily="34" charset="-120"/>
-              </a:rPr>
-              <a:t>Usman Akram  •  COMSATS University Islamabad</a:t>
-            </a:r>
-            <a:endParaRPr lang="en-US" sz="900" dirty="0"/>
-          </a:p>
-        </p:txBody>
-      </p:sp>
-      <p:sp>
-        <p:nvSpPr>
-          <p:cNvPr id="8" name="Text 6"/>
-          <p:cNvSpPr txBox="1"/>
-          <p:nvPr/>
-        </p:nvSpPr>
-        <p:spPr>
-          <a:xfrm>
-            <a:off x="11155680" y="6446520"/>
-            <a:ext cx="457200" cy="292608"/>
-          </a:xfrm>
-          <a:prstGeom prst="rect">
-            <a:avLst/>
-          </a:prstGeom>
-          <a:noFill/>
-          <a:ln/>
-        </p:spPr>
-        <p:txBody>
-          <a:bodyPr wrap="square" lIns="0" tIns="0" rIns="0" bIns="0" rtlCol="0" anchor="ctr"/>
-          <a:lstStyle/>
-          <a:p>
-            <a:pPr algn="r" indent="0" marL="0">
-              <a:buNone/>
-            </a:pPr>
-            <a:r>
-              <a:rPr lang="en-US" sz="900" dirty="0">
-                <a:solidFill>
-                  <a:srgbClr val="5D5D72"/>
-                </a:solidFill>
-                <a:latin typeface="Calibri" pitchFamily="34" charset="0"/>
-                <a:ea typeface="Calibri" pitchFamily="34" charset="-122"/>
-                <a:cs typeface="Calibri" pitchFamily="34" charset="-120"/>
-              </a:rPr>
-              <a:t>14</a:t>
-            </a:r>
-            <a:endParaRPr lang="en-US" sz="900" dirty="0"/>
+          <p:cNvPr id="9" name="cuinotes-footer-mark"/>
+          <p:cNvSpPr txBox="1"/>
+          <p:nvPr/>
+        </p:nvSpPr>
+        <p:spPr>
+          <a:xfrm>
+            <a:off x="9951720" y="6455664"/>
+            <a:ext cx="2011680" cy="292608"/>
+          </a:xfrm>
+          <a:prstGeom prst="rect">
+            <a:avLst/>
+          </a:prstGeom>
+          <a:noFill/>
+        </p:spPr>
+        <p:txBody>
+          <a:bodyPr wrap="none" lIns="0" rIns="0" tIns="0" bIns="0">
+            <a:spAutoFit/>
+          </a:bodyPr>
+          <a:lstStyle/>
+          <a:p>
+            <a:pPr algn="r"/>
+            <a:r>
+              <a:rPr sz="1000">
+                <a:solidFill>
+                  <a:srgbClr val="8A939B"/>
+                </a:solidFill>
+                <a:hlinkClick r:id="rId3"/>
+              </a:rPr>
+              <a:t>cuinotes.com</a:t>
+            </a:r>
+            <a:r>
+              <a:rPr sz="1000">
+                <a:solidFill>
+                  <a:srgbClr val="8A939B"/>
+                </a:solidFill>
+              </a:rPr>
+              <a:t>  ·  14</a:t>
+            </a:r>
           </a:p>
         </p:txBody>
       </p:sp>
@@ -5169,6 +4983,10 @@
             <a:prstDash val="solid"/>
           </a:ln>
         </p:spPr>
+        <p:txBody>
+          <a:bodyPr/>
+          <a:p/>
+        </p:txBody>
       </p:sp>
       <p:sp>
         <p:nvSpPr>
@@ -5250,79 +5068,44 @@
       </p:sp>
       <p:sp>
         <p:nvSpPr>
-          <p:cNvPr id="7" name="Text 5"/>
-          <p:cNvSpPr txBox="1"/>
-          <p:nvPr/>
-        </p:nvSpPr>
-        <p:spPr>
-          <a:xfrm>
-            <a:off x="640080" y="6446520"/>
-            <a:ext cx="8686800" cy="292608"/>
-          </a:xfrm>
-          <a:prstGeom prst="rect">
-            <a:avLst/>
-          </a:prstGeom>
-          <a:noFill/>
-          <a:ln/>
-        </p:spPr>
-        <p:txBody>
-          <a:bodyPr wrap="square" lIns="0" tIns="0" rIns="0" bIns="0" rtlCol="0" anchor="ctr"/>
-          <a:lstStyle/>
-          <a:p>
-            <a:pPr algn="l" indent="0" marL="0">
-              <a:buNone/>
-            </a:pPr>
-            <a:r>
-              <a:rPr lang="en-US" sz="900" dirty="0">
-                <a:solidFill>
-                  <a:srgbClr val="5D5D72"/>
-                </a:solidFill>
-                <a:latin typeface="Calibri" pitchFamily="34" charset="0"/>
-                <a:ea typeface="Calibri" pitchFamily="34" charset="-122"/>
-                <a:cs typeface="Calibri" pitchFamily="34" charset="-120"/>
-              </a:rPr>
-              <a:t>Usman Akram  •  COMSATS University Islamabad</a:t>
-            </a:r>
-            <a:endParaRPr lang="en-US" sz="900" dirty="0"/>
-          </a:p>
-        </p:txBody>
-      </p:sp>
-      <p:sp>
-        <p:nvSpPr>
-          <p:cNvPr id="8" name="Text 6"/>
-          <p:cNvSpPr txBox="1"/>
-          <p:nvPr/>
-        </p:nvSpPr>
-        <p:spPr>
-          <a:xfrm>
-            <a:off x="11155680" y="6446520"/>
-            <a:ext cx="457200" cy="292608"/>
-          </a:xfrm>
-          <a:prstGeom prst="rect">
-            <a:avLst/>
-          </a:prstGeom>
-          <a:noFill/>
-          <a:ln/>
-        </p:spPr>
-        <p:txBody>
-          <a:bodyPr wrap="square" lIns="0" tIns="0" rIns="0" bIns="0" rtlCol="0" anchor="ctr"/>
-          <a:lstStyle/>
-          <a:p>
-            <a:pPr algn="r" indent="0" marL="0">
-              <a:buNone/>
-            </a:pPr>
-            <a:r>
-              <a:rPr lang="en-US" sz="900" dirty="0">
-                <a:solidFill>
-                  <a:srgbClr val="5D5D72"/>
-                </a:solidFill>
-                <a:latin typeface="Calibri" pitchFamily="34" charset="0"/>
-                <a:ea typeface="Calibri" pitchFamily="34" charset="-122"/>
-                <a:cs typeface="Calibri" pitchFamily="34" charset="-120"/>
-              </a:rPr>
-              <a:t>15</a:t>
-            </a:r>
-            <a:endParaRPr lang="en-US" sz="900" dirty="0"/>
+          <p:cNvPr id="9" name="cuinotes-footer-mark"/>
+          <p:cNvSpPr txBox="1"/>
+          <p:nvPr/>
+        </p:nvSpPr>
+        <p:spPr>
+          <a:xfrm>
+            <a:off x="9951720" y="6455664"/>
+            <a:ext cx="2011680" cy="292608"/>
+          </a:xfrm>
+          <a:prstGeom prst="rect">
+            <a:avLst/>
+          </a:prstGeom>
+          <a:noFill/>
+        </p:spPr>
+        <p:txBody>
+          <a:bodyPr wrap="none" lIns="0" rIns="0" tIns="0" bIns="0">
+            <a:spAutoFit/>
+          </a:bodyPr>
+          <a:lstStyle/>
+          <a:p>
+            <a:pPr algn="r"/>
+            <a:r>
+              <a:rPr sz="1000">
+                <a:solidFill>
+                  <a:srgbClr val="8A939B"/>
+                </a:solidFill>
+                <a:hlinkClick r:id="rId3"/>
+              </a:rPr>
+              <a:t>cuinotes.com</a:t>
+            </a:r>
+            <a:r>
+              <a:rPr sz="1000">
+                <a:solidFill>
+                  <a:srgbClr val="8A939B"/>
+                </a:solidFill>
+              </a:rPr>
+              <a:t>  ·  15</a:t>
+            </a:r>
           </a:p>
         </p:txBody>
       </p:sp>
@@ -5457,6 +5240,10 @@
           </a:solidFill>
           <a:ln/>
         </p:spPr>
+        <p:txBody>
+          <a:bodyPr/>
+          <a:p/>
+        </p:txBody>
       </p:sp>
       <p:sp>
         <p:nvSpPr>
@@ -5728,79 +5515,44 @@
       </p:sp>
       <p:sp>
         <p:nvSpPr>
-          <p:cNvPr id="7" name="Text 5"/>
-          <p:cNvSpPr txBox="1"/>
-          <p:nvPr/>
-        </p:nvSpPr>
-        <p:spPr>
-          <a:xfrm>
-            <a:off x="640080" y="6446520"/>
-            <a:ext cx="8686800" cy="292608"/>
-          </a:xfrm>
-          <a:prstGeom prst="rect">
-            <a:avLst/>
-          </a:prstGeom>
-          <a:noFill/>
-          <a:ln/>
-        </p:spPr>
-        <p:txBody>
-          <a:bodyPr wrap="square" lIns="0" tIns="0" rIns="0" bIns="0" rtlCol="0" anchor="ctr"/>
-          <a:lstStyle/>
-          <a:p>
-            <a:pPr algn="l" indent="0" marL="0">
-              <a:buNone/>
-            </a:pPr>
-            <a:r>
-              <a:rPr lang="en-US" sz="900" dirty="0">
-                <a:solidFill>
-                  <a:srgbClr val="5D5D72"/>
-                </a:solidFill>
-                <a:latin typeface="Calibri" pitchFamily="34" charset="0"/>
-                <a:ea typeface="Calibri" pitchFamily="34" charset="-122"/>
-                <a:cs typeface="Calibri" pitchFamily="34" charset="-120"/>
-              </a:rPr>
-              <a:t>Usman Akram  •  COMSATS University Islamabad</a:t>
-            </a:r>
-            <a:endParaRPr lang="en-US" sz="900" dirty="0"/>
-          </a:p>
-        </p:txBody>
-      </p:sp>
-      <p:sp>
-        <p:nvSpPr>
-          <p:cNvPr id="8" name="Text 6"/>
-          <p:cNvSpPr txBox="1"/>
-          <p:nvPr/>
-        </p:nvSpPr>
-        <p:spPr>
-          <a:xfrm>
-            <a:off x="11155680" y="6446520"/>
-            <a:ext cx="457200" cy="292608"/>
-          </a:xfrm>
-          <a:prstGeom prst="rect">
-            <a:avLst/>
-          </a:prstGeom>
-          <a:noFill/>
-          <a:ln/>
-        </p:spPr>
-        <p:txBody>
-          <a:bodyPr wrap="square" lIns="0" tIns="0" rIns="0" bIns="0" rtlCol="0" anchor="ctr"/>
-          <a:lstStyle/>
-          <a:p>
-            <a:pPr algn="r" indent="0" marL="0">
-              <a:buNone/>
-            </a:pPr>
-            <a:r>
-              <a:rPr lang="en-US" sz="900" dirty="0">
-                <a:solidFill>
-                  <a:srgbClr val="5D5D72"/>
-                </a:solidFill>
-                <a:latin typeface="Calibri" pitchFamily="34" charset="0"/>
-                <a:ea typeface="Calibri" pitchFamily="34" charset="-122"/>
-                <a:cs typeface="Calibri" pitchFamily="34" charset="-120"/>
-              </a:rPr>
-              <a:t>16</a:t>
-            </a:r>
-            <a:endParaRPr lang="en-US" sz="900" dirty="0"/>
+          <p:cNvPr id="9" name="cuinotes-footer-mark"/>
+          <p:cNvSpPr txBox="1"/>
+          <p:nvPr/>
+        </p:nvSpPr>
+        <p:spPr>
+          <a:xfrm>
+            <a:off x="9951720" y="6455664"/>
+            <a:ext cx="2011680" cy="292608"/>
+          </a:xfrm>
+          <a:prstGeom prst="rect">
+            <a:avLst/>
+          </a:prstGeom>
+          <a:noFill/>
+        </p:spPr>
+        <p:txBody>
+          <a:bodyPr wrap="none" lIns="0" rIns="0" tIns="0" bIns="0">
+            <a:spAutoFit/>
+          </a:bodyPr>
+          <a:lstStyle/>
+          <a:p>
+            <a:pPr algn="r"/>
+            <a:r>
+              <a:rPr sz="1000">
+                <a:solidFill>
+                  <a:srgbClr val="8A939B"/>
+                </a:solidFill>
+                <a:hlinkClick r:id="rId3"/>
+              </a:rPr>
+              <a:t>cuinotes.com</a:t>
+            </a:r>
+            <a:r>
+              <a:rPr sz="1000">
+                <a:solidFill>
+                  <a:srgbClr val="8A939B"/>
+                </a:solidFill>
+              </a:rPr>
+              <a:t>  ·  16</a:t>
+            </a:r>
           </a:p>
         </p:txBody>
       </p:sp>
@@ -5935,6 +5687,10 @@
           </a:solidFill>
           <a:ln/>
         </p:spPr>
+        <p:txBody>
+          <a:bodyPr/>
+          <a:p/>
+        </p:txBody>
       </p:sp>
       <p:sp>
         <p:nvSpPr>
@@ -6149,79 +5905,44 @@
       </p:sp>
       <p:sp>
         <p:nvSpPr>
-          <p:cNvPr id="6" name="Text 4"/>
-          <p:cNvSpPr txBox="1"/>
-          <p:nvPr/>
-        </p:nvSpPr>
-        <p:spPr>
-          <a:xfrm>
-            <a:off x="640080" y="6446520"/>
-            <a:ext cx="8686800" cy="292608"/>
-          </a:xfrm>
-          <a:prstGeom prst="rect">
-            <a:avLst/>
-          </a:prstGeom>
-          <a:noFill/>
-          <a:ln/>
-        </p:spPr>
-        <p:txBody>
-          <a:bodyPr wrap="square" lIns="0" tIns="0" rIns="0" bIns="0" rtlCol="0" anchor="ctr"/>
-          <a:lstStyle/>
-          <a:p>
-            <a:pPr algn="l" indent="0" marL="0">
-              <a:buNone/>
-            </a:pPr>
-            <a:r>
-              <a:rPr lang="en-US" sz="900" dirty="0">
-                <a:solidFill>
-                  <a:srgbClr val="5D5D72"/>
-                </a:solidFill>
-                <a:latin typeface="Calibri" pitchFamily="34" charset="0"/>
-                <a:ea typeface="Calibri" pitchFamily="34" charset="-122"/>
-                <a:cs typeface="Calibri" pitchFamily="34" charset="-120"/>
-              </a:rPr>
-              <a:t>Usman Akram  •  COMSATS University Islamabad</a:t>
-            </a:r>
-            <a:endParaRPr lang="en-US" sz="900" dirty="0"/>
-          </a:p>
-        </p:txBody>
-      </p:sp>
-      <p:sp>
-        <p:nvSpPr>
-          <p:cNvPr id="7" name="Text 5"/>
-          <p:cNvSpPr txBox="1"/>
-          <p:nvPr/>
-        </p:nvSpPr>
-        <p:spPr>
-          <a:xfrm>
-            <a:off x="11155680" y="6446520"/>
-            <a:ext cx="457200" cy="292608"/>
-          </a:xfrm>
-          <a:prstGeom prst="rect">
-            <a:avLst/>
-          </a:prstGeom>
-          <a:noFill/>
-          <a:ln/>
-        </p:spPr>
-        <p:txBody>
-          <a:bodyPr wrap="square" lIns="0" tIns="0" rIns="0" bIns="0" rtlCol="0" anchor="ctr"/>
-          <a:lstStyle/>
-          <a:p>
-            <a:pPr algn="r" indent="0" marL="0">
-              <a:buNone/>
-            </a:pPr>
-            <a:r>
-              <a:rPr lang="en-US" sz="900" dirty="0">
-                <a:solidFill>
-                  <a:srgbClr val="5D5D72"/>
-                </a:solidFill>
-                <a:latin typeface="Calibri" pitchFamily="34" charset="0"/>
-                <a:ea typeface="Calibri" pitchFamily="34" charset="-122"/>
-                <a:cs typeface="Calibri" pitchFamily="34" charset="-120"/>
-              </a:rPr>
-              <a:t>17</a:t>
-            </a:r>
-            <a:endParaRPr lang="en-US" sz="900" dirty="0"/>
+          <p:cNvPr id="8" name="cuinotes-footer-mark"/>
+          <p:cNvSpPr txBox="1"/>
+          <p:nvPr/>
+        </p:nvSpPr>
+        <p:spPr>
+          <a:xfrm>
+            <a:off x="9951720" y="6455664"/>
+            <a:ext cx="2011680" cy="292608"/>
+          </a:xfrm>
+          <a:prstGeom prst="rect">
+            <a:avLst/>
+          </a:prstGeom>
+          <a:noFill/>
+        </p:spPr>
+        <p:txBody>
+          <a:bodyPr wrap="none" lIns="0" rIns="0" tIns="0" bIns="0">
+            <a:spAutoFit/>
+          </a:bodyPr>
+          <a:lstStyle/>
+          <a:p>
+            <a:pPr algn="r"/>
+            <a:r>
+              <a:rPr sz="1000">
+                <a:solidFill>
+                  <a:srgbClr val="8A939B"/>
+                </a:solidFill>
+                <a:hlinkClick r:id="rId3"/>
+              </a:rPr>
+              <a:t>cuinotes.com</a:t>
+            </a:r>
+            <a:r>
+              <a:rPr sz="1000">
+                <a:solidFill>
+                  <a:srgbClr val="8A939B"/>
+                </a:solidFill>
+              </a:rPr>
+              <a:t>  ·  17</a:t>
+            </a:r>
           </a:p>
         </p:txBody>
       </p:sp>
@@ -7057,79 +6778,44 @@
       </p:graphicFrame>
       <p:sp>
         <p:nvSpPr>
-          <p:cNvPr id="5" name="Text 2"/>
-          <p:cNvSpPr txBox="1"/>
-          <p:nvPr/>
-        </p:nvSpPr>
-        <p:spPr>
-          <a:xfrm>
-            <a:off x="640080" y="6446520"/>
-            <a:ext cx="8686800" cy="292608"/>
-          </a:xfrm>
-          <a:prstGeom prst="rect">
-            <a:avLst/>
-          </a:prstGeom>
-          <a:noFill/>
-          <a:ln/>
-        </p:spPr>
-        <p:txBody>
-          <a:bodyPr wrap="square" lIns="0" tIns="0" rIns="0" bIns="0" rtlCol="0" anchor="ctr"/>
-          <a:lstStyle/>
-          <a:p>
-            <a:pPr algn="l" indent="0" marL="0">
-              <a:buNone/>
-            </a:pPr>
-            <a:r>
-              <a:rPr lang="en-US" sz="900" dirty="0">
-                <a:solidFill>
-                  <a:srgbClr val="5D5D72"/>
-                </a:solidFill>
-                <a:latin typeface="Calibri" pitchFamily="34" charset="0"/>
-                <a:ea typeface="Calibri" pitchFamily="34" charset="-122"/>
-                <a:cs typeface="Calibri" pitchFamily="34" charset="-120"/>
-              </a:rPr>
-              <a:t>Usman Akram  •  COMSATS University Islamabad</a:t>
-            </a:r>
-            <a:endParaRPr lang="en-US" sz="900" dirty="0"/>
-          </a:p>
-        </p:txBody>
-      </p:sp>
-      <p:sp>
-        <p:nvSpPr>
-          <p:cNvPr id="6" name="Text 3"/>
-          <p:cNvSpPr txBox="1"/>
-          <p:nvPr/>
-        </p:nvSpPr>
-        <p:spPr>
-          <a:xfrm>
-            <a:off x="11155680" y="6446520"/>
-            <a:ext cx="457200" cy="292608"/>
-          </a:xfrm>
-          <a:prstGeom prst="rect">
-            <a:avLst/>
-          </a:prstGeom>
-          <a:noFill/>
-          <a:ln/>
-        </p:spPr>
-        <p:txBody>
-          <a:bodyPr wrap="square" lIns="0" tIns="0" rIns="0" bIns="0" rtlCol="0" anchor="ctr"/>
-          <a:lstStyle/>
-          <a:p>
-            <a:pPr algn="r" indent="0" marL="0">
-              <a:buNone/>
-            </a:pPr>
-            <a:r>
-              <a:rPr lang="en-US" sz="900" dirty="0">
-                <a:solidFill>
-                  <a:srgbClr val="5D5D72"/>
-                </a:solidFill>
-                <a:latin typeface="Calibri" pitchFamily="34" charset="0"/>
-                <a:ea typeface="Calibri" pitchFamily="34" charset="-122"/>
-                <a:cs typeface="Calibri" pitchFamily="34" charset="-120"/>
-              </a:rPr>
-              <a:t>18</a:t>
-            </a:r>
-            <a:endParaRPr lang="en-US" sz="900" dirty="0"/>
+          <p:cNvPr id="20" name="cuinotes-footer-mark"/>
+          <p:cNvSpPr txBox="1"/>
+          <p:nvPr/>
+        </p:nvSpPr>
+        <p:spPr>
+          <a:xfrm>
+            <a:off x="9951720" y="6455664"/>
+            <a:ext cx="2011680" cy="292608"/>
+          </a:xfrm>
+          <a:prstGeom prst="rect">
+            <a:avLst/>
+          </a:prstGeom>
+          <a:noFill/>
+        </p:spPr>
+        <p:txBody>
+          <a:bodyPr wrap="none" lIns="0" rIns="0" tIns="0" bIns="0">
+            <a:spAutoFit/>
+          </a:bodyPr>
+          <a:lstStyle/>
+          <a:p>
+            <a:pPr algn="r"/>
+            <a:r>
+              <a:rPr sz="1000">
+                <a:solidFill>
+                  <a:srgbClr val="8A939B"/>
+                </a:solidFill>
+                <a:hlinkClick r:id="rId3"/>
+              </a:rPr>
+              <a:t>cuinotes.com</a:t>
+            </a:r>
+            <a:r>
+              <a:rPr sz="1000">
+                <a:solidFill>
+                  <a:srgbClr val="8A939B"/>
+                </a:solidFill>
+              </a:rPr>
+              <a:t>  ·  18</a:t>
+            </a:r>
           </a:p>
         </p:txBody>
       </p:sp>
@@ -7266,6 +6952,10 @@
             <a:tailEnd type="triangle"/>
           </a:ln>
         </p:spPr>
+        <p:txBody>
+          <a:bodyPr/>
+          <a:p/>
+        </p:txBody>
       </p:sp>
       <p:sp>
         <p:nvSpPr>
@@ -7290,6 +6980,10 @@
             <a:tailEnd type="triangle"/>
           </a:ln>
         </p:spPr>
+        <p:txBody>
+          <a:bodyPr/>
+          <a:p/>
+        </p:txBody>
       </p:sp>
       <p:sp>
         <p:nvSpPr>
@@ -7314,6 +7008,10 @@
             <a:tailEnd type="triangle"/>
           </a:ln>
         </p:spPr>
+        <p:txBody>
+          <a:bodyPr/>
+          <a:p/>
+        </p:txBody>
       </p:sp>
       <p:sp>
         <p:nvSpPr>
@@ -7338,6 +7036,10 @@
             <a:tailEnd type="triangle"/>
           </a:ln>
         </p:spPr>
+        <p:txBody>
+          <a:bodyPr/>
+          <a:p/>
+        </p:txBody>
       </p:sp>
       <p:sp>
         <p:nvSpPr>
@@ -7362,6 +7064,10 @@
             <a:tailEnd type="triangle"/>
           </a:ln>
         </p:spPr>
+        <p:txBody>
+          <a:bodyPr/>
+          <a:p/>
+        </p:txBody>
       </p:sp>
       <p:sp>
         <p:nvSpPr>
@@ -7386,6 +7092,10 @@
             <a:tailEnd type="triangle"/>
           </a:ln>
         </p:spPr>
+        <p:txBody>
+          <a:bodyPr/>
+          <a:p/>
+        </p:txBody>
       </p:sp>
       <p:sp>
         <p:nvSpPr>
@@ -7406,6 +7116,10 @@
           </a:solidFill>
           <a:ln/>
         </p:spPr>
+        <p:txBody>
+          <a:bodyPr/>
+          <a:p/>
+        </p:txBody>
       </p:sp>
       <p:sp>
         <p:nvSpPr>
@@ -7468,6 +7182,10 @@
           </a:solidFill>
           <a:ln/>
         </p:spPr>
+        <p:txBody>
+          <a:bodyPr/>
+          <a:p/>
+        </p:txBody>
       </p:sp>
       <p:sp>
         <p:nvSpPr>
@@ -7530,6 +7248,10 @@
           </a:solidFill>
           <a:ln/>
         </p:spPr>
+        <p:txBody>
+          <a:bodyPr/>
+          <a:p/>
+        </p:txBody>
       </p:sp>
       <p:sp>
         <p:nvSpPr>
@@ -7592,6 +7314,10 @@
           </a:solidFill>
           <a:ln/>
         </p:spPr>
+        <p:txBody>
+          <a:bodyPr/>
+          <a:p/>
+        </p:txBody>
       </p:sp>
       <p:sp>
         <p:nvSpPr>
@@ -7654,6 +7380,10 @@
           </a:solidFill>
           <a:ln/>
         </p:spPr>
+        <p:txBody>
+          <a:bodyPr/>
+          <a:p/>
+        </p:txBody>
       </p:sp>
       <p:sp>
         <p:nvSpPr>
@@ -7716,6 +7446,10 @@
           </a:solidFill>
           <a:ln/>
         </p:spPr>
+        <p:txBody>
+          <a:bodyPr/>
+          <a:p/>
+        </p:txBody>
       </p:sp>
       <p:sp>
         <p:nvSpPr>
@@ -7778,6 +7512,10 @@
           </a:solidFill>
           <a:ln/>
         </p:spPr>
+        <p:txBody>
+          <a:bodyPr/>
+          <a:p/>
+        </p:txBody>
       </p:sp>
       <p:sp>
         <p:nvSpPr>
@@ -7840,6 +7578,10 @@
           </a:solidFill>
           <a:ln/>
         </p:spPr>
+        <p:txBody>
+          <a:bodyPr/>
+          <a:p/>
+        </p:txBody>
       </p:sp>
       <p:sp>
         <p:nvSpPr>
@@ -7902,6 +7644,10 @@
           </a:solidFill>
           <a:ln/>
         </p:spPr>
+        <p:txBody>
+          <a:bodyPr/>
+          <a:p/>
+        </p:txBody>
       </p:sp>
       <p:sp>
         <p:nvSpPr>
@@ -7964,6 +7710,10 @@
           </a:solidFill>
           <a:ln/>
         </p:spPr>
+        <p:txBody>
+          <a:bodyPr/>
+          <a:p/>
+        </p:txBody>
       </p:sp>
       <p:sp>
         <p:nvSpPr>
@@ -8048,79 +7798,44 @@
       </p:sp>
       <p:sp>
         <p:nvSpPr>
-          <p:cNvPr id="31" name="Text 29"/>
-          <p:cNvSpPr txBox="1"/>
-          <p:nvPr/>
-        </p:nvSpPr>
-        <p:spPr>
-          <a:xfrm>
-            <a:off x="640080" y="6446520"/>
-            <a:ext cx="8686800" cy="292608"/>
-          </a:xfrm>
-          <a:prstGeom prst="rect">
-            <a:avLst/>
-          </a:prstGeom>
-          <a:noFill/>
-          <a:ln/>
-        </p:spPr>
-        <p:txBody>
-          <a:bodyPr wrap="square" lIns="0" tIns="0" rIns="0" bIns="0" rtlCol="0" anchor="ctr"/>
-          <a:lstStyle/>
-          <a:p>
-            <a:pPr algn="l" indent="0" marL="0">
-              <a:buNone/>
-            </a:pPr>
-            <a:r>
-              <a:rPr lang="en-US" sz="900" dirty="0">
-                <a:solidFill>
-                  <a:srgbClr val="5D5D72"/>
-                </a:solidFill>
-                <a:latin typeface="Calibri" pitchFamily="34" charset="0"/>
-                <a:ea typeface="Calibri" pitchFamily="34" charset="-122"/>
-                <a:cs typeface="Calibri" pitchFamily="34" charset="-120"/>
-              </a:rPr>
-              <a:t>Usman Akram  •  COMSATS University Islamabad</a:t>
-            </a:r>
-            <a:endParaRPr lang="en-US" sz="900" dirty="0"/>
-          </a:p>
-        </p:txBody>
-      </p:sp>
-      <p:sp>
-        <p:nvSpPr>
-          <p:cNvPr id="32" name="Text 30"/>
-          <p:cNvSpPr txBox="1"/>
-          <p:nvPr/>
-        </p:nvSpPr>
-        <p:spPr>
-          <a:xfrm>
-            <a:off x="11155680" y="6446520"/>
-            <a:ext cx="457200" cy="292608"/>
-          </a:xfrm>
-          <a:prstGeom prst="rect">
-            <a:avLst/>
-          </a:prstGeom>
-          <a:noFill/>
-          <a:ln/>
-        </p:spPr>
-        <p:txBody>
-          <a:bodyPr wrap="square" lIns="0" tIns="0" rIns="0" bIns="0" rtlCol="0" anchor="ctr"/>
-          <a:lstStyle/>
-          <a:p>
-            <a:pPr algn="r" indent="0" marL="0">
-              <a:buNone/>
-            </a:pPr>
-            <a:r>
-              <a:rPr lang="en-US" sz="900" dirty="0">
-                <a:solidFill>
-                  <a:srgbClr val="5D5D72"/>
-                </a:solidFill>
-                <a:latin typeface="Calibri" pitchFamily="34" charset="0"/>
-                <a:ea typeface="Calibri" pitchFamily="34" charset="-122"/>
-                <a:cs typeface="Calibri" pitchFamily="34" charset="-120"/>
-              </a:rPr>
-              <a:t>19</a:t>
-            </a:r>
-            <a:endParaRPr lang="en-US" sz="900" dirty="0"/>
+          <p:cNvPr id="33" name="cuinotes-footer-mark"/>
+          <p:cNvSpPr txBox="1"/>
+          <p:nvPr/>
+        </p:nvSpPr>
+        <p:spPr>
+          <a:xfrm>
+            <a:off x="9951720" y="6455664"/>
+            <a:ext cx="2011680" cy="292608"/>
+          </a:xfrm>
+          <a:prstGeom prst="rect">
+            <a:avLst/>
+          </a:prstGeom>
+          <a:noFill/>
+        </p:spPr>
+        <p:txBody>
+          <a:bodyPr wrap="none" lIns="0" rIns="0" tIns="0" bIns="0">
+            <a:spAutoFit/>
+          </a:bodyPr>
+          <a:lstStyle/>
+          <a:p>
+            <a:pPr algn="r"/>
+            <a:r>
+              <a:rPr sz="1000">
+                <a:solidFill>
+                  <a:srgbClr val="8A939B"/>
+                </a:solidFill>
+                <a:hlinkClick r:id="rId3"/>
+              </a:rPr>
+              <a:t>cuinotes.com</a:t>
+            </a:r>
+            <a:r>
+              <a:rPr sz="1000">
+                <a:solidFill>
+                  <a:srgbClr val="8A939B"/>
+                </a:solidFill>
+              </a:rPr>
+              <a:t>  ·  19</a:t>
+            </a:r>
           </a:p>
         </p:txBody>
       </p:sp>
@@ -8253,6 +7968,10 @@
           </a:solidFill>
           <a:ln/>
         </p:spPr>
+        <p:txBody>
+          <a:bodyPr/>
+          <a:p/>
+        </p:txBody>
       </p:sp>
       <p:sp>
         <p:nvSpPr>
@@ -8351,6 +8070,10 @@
           </a:solidFill>
           <a:ln/>
         </p:spPr>
+        <p:txBody>
+          <a:bodyPr/>
+          <a:p/>
+        </p:txBody>
       </p:sp>
       <p:sp>
         <p:nvSpPr>
@@ -8449,6 +8172,10 @@
           </a:solidFill>
           <a:ln/>
         </p:spPr>
+        <p:txBody>
+          <a:bodyPr/>
+          <a:p/>
+        </p:txBody>
       </p:sp>
       <p:sp>
         <p:nvSpPr>
@@ -8547,6 +8274,10 @@
           </a:solidFill>
           <a:ln/>
         </p:spPr>
+        <p:txBody>
+          <a:bodyPr/>
+          <a:p/>
+        </p:txBody>
       </p:sp>
       <p:sp>
         <p:nvSpPr>
@@ -8645,6 +8376,10 @@
           </a:solidFill>
           <a:ln/>
         </p:spPr>
+        <p:txBody>
+          <a:bodyPr/>
+          <a:p/>
+        </p:txBody>
       </p:sp>
       <p:sp>
         <p:nvSpPr>
@@ -8743,6 +8478,10 @@
           </a:solidFill>
           <a:ln/>
         </p:spPr>
+        <p:txBody>
+          <a:bodyPr/>
+          <a:p/>
+        </p:txBody>
       </p:sp>
       <p:sp>
         <p:nvSpPr>
@@ -8824,79 +8563,44 @@
       </p:sp>
       <p:sp>
         <p:nvSpPr>
-          <p:cNvPr id="22" name="Text 20"/>
-          <p:cNvSpPr txBox="1"/>
-          <p:nvPr/>
-        </p:nvSpPr>
-        <p:spPr>
-          <a:xfrm>
-            <a:off x="640080" y="6446520"/>
-            <a:ext cx="8686800" cy="292608"/>
-          </a:xfrm>
-          <a:prstGeom prst="rect">
-            <a:avLst/>
-          </a:prstGeom>
-          <a:noFill/>
-          <a:ln/>
-        </p:spPr>
-        <p:txBody>
-          <a:bodyPr wrap="square" lIns="0" tIns="0" rIns="0" bIns="0" rtlCol="0" anchor="ctr"/>
-          <a:lstStyle/>
-          <a:p>
-            <a:pPr algn="l" indent="0" marL="0">
-              <a:buNone/>
-            </a:pPr>
-            <a:r>
-              <a:rPr lang="en-US" sz="900" dirty="0">
-                <a:solidFill>
-                  <a:srgbClr val="5D5D72"/>
-                </a:solidFill>
-                <a:latin typeface="Calibri" pitchFamily="34" charset="0"/>
-                <a:ea typeface="Calibri" pitchFamily="34" charset="-122"/>
-                <a:cs typeface="Calibri" pitchFamily="34" charset="-120"/>
-              </a:rPr>
-              <a:t>Usman Akram  •  COMSATS University Islamabad</a:t>
-            </a:r>
-            <a:endParaRPr lang="en-US" sz="900" dirty="0"/>
-          </a:p>
-        </p:txBody>
-      </p:sp>
-      <p:sp>
-        <p:nvSpPr>
-          <p:cNvPr id="23" name="Text 21"/>
-          <p:cNvSpPr txBox="1"/>
-          <p:nvPr/>
-        </p:nvSpPr>
-        <p:spPr>
-          <a:xfrm>
-            <a:off x="11155680" y="6446520"/>
-            <a:ext cx="457200" cy="292608"/>
-          </a:xfrm>
-          <a:prstGeom prst="rect">
-            <a:avLst/>
-          </a:prstGeom>
-          <a:noFill/>
-          <a:ln/>
-        </p:spPr>
-        <p:txBody>
-          <a:bodyPr wrap="square" lIns="0" tIns="0" rIns="0" bIns="0" rtlCol="0" anchor="ctr"/>
-          <a:lstStyle/>
-          <a:p>
-            <a:pPr algn="r" indent="0" marL="0">
-              <a:buNone/>
-            </a:pPr>
-            <a:r>
-              <a:rPr lang="en-US" sz="900" dirty="0">
-                <a:solidFill>
-                  <a:srgbClr val="5D5D72"/>
-                </a:solidFill>
-                <a:latin typeface="Calibri" pitchFamily="34" charset="0"/>
-                <a:ea typeface="Calibri" pitchFamily="34" charset="-122"/>
-                <a:cs typeface="Calibri" pitchFamily="34" charset="-120"/>
-              </a:rPr>
-              <a:t>2</a:t>
-            </a:r>
-            <a:endParaRPr lang="en-US" sz="900" dirty="0"/>
+          <p:cNvPr id="24" name="cuinotes-footer-mark"/>
+          <p:cNvSpPr txBox="1"/>
+          <p:nvPr/>
+        </p:nvSpPr>
+        <p:spPr>
+          <a:xfrm>
+            <a:off x="9951720" y="6455664"/>
+            <a:ext cx="2011680" cy="292608"/>
+          </a:xfrm>
+          <a:prstGeom prst="rect">
+            <a:avLst/>
+          </a:prstGeom>
+          <a:noFill/>
+        </p:spPr>
+        <p:txBody>
+          <a:bodyPr wrap="none" lIns="0" rIns="0" tIns="0" bIns="0">
+            <a:spAutoFit/>
+          </a:bodyPr>
+          <a:lstStyle/>
+          <a:p>
+            <a:pPr algn="r"/>
+            <a:r>
+              <a:rPr sz="1000">
+                <a:solidFill>
+                  <a:srgbClr val="8A939B"/>
+                </a:solidFill>
+                <a:hlinkClick r:id="rId3"/>
+              </a:rPr>
+              <a:t>cuinotes.com</a:t>
+            </a:r>
+            <a:r>
+              <a:rPr sz="1000">
+                <a:solidFill>
+                  <a:srgbClr val="8A939B"/>
+                </a:solidFill>
+              </a:rPr>
+              <a:t>  ·  2</a:t>
+            </a:r>
           </a:p>
         </p:txBody>
       </p:sp>
@@ -9031,6 +8735,10 @@
           </a:solidFill>
           <a:ln/>
         </p:spPr>
+        <p:txBody>
+          <a:bodyPr/>
+          <a:p/>
+        </p:txBody>
       </p:sp>
       <p:sp>
         <p:nvSpPr>
@@ -9244,79 +8952,44 @@
       </p:sp>
       <p:sp>
         <p:nvSpPr>
-          <p:cNvPr id="7" name="Text 5"/>
-          <p:cNvSpPr txBox="1"/>
-          <p:nvPr/>
-        </p:nvSpPr>
-        <p:spPr>
-          <a:xfrm>
-            <a:off x="640080" y="6446520"/>
-            <a:ext cx="8686800" cy="292608"/>
-          </a:xfrm>
-          <a:prstGeom prst="rect">
-            <a:avLst/>
-          </a:prstGeom>
-          <a:noFill/>
-          <a:ln/>
-        </p:spPr>
-        <p:txBody>
-          <a:bodyPr wrap="square" lIns="0" tIns="0" rIns="0" bIns="0" rtlCol="0" anchor="ctr"/>
-          <a:lstStyle/>
-          <a:p>
-            <a:pPr algn="l" indent="0" marL="0">
-              <a:buNone/>
-            </a:pPr>
-            <a:r>
-              <a:rPr lang="en-US" sz="900" dirty="0">
-                <a:solidFill>
-                  <a:srgbClr val="5D5D72"/>
-                </a:solidFill>
-                <a:latin typeface="Calibri" pitchFamily="34" charset="0"/>
-                <a:ea typeface="Calibri" pitchFamily="34" charset="-122"/>
-                <a:cs typeface="Calibri" pitchFamily="34" charset="-120"/>
-              </a:rPr>
-              <a:t>Usman Akram  •  COMSATS University Islamabad</a:t>
-            </a:r>
-            <a:endParaRPr lang="en-US" sz="900" dirty="0"/>
-          </a:p>
-        </p:txBody>
-      </p:sp>
-      <p:sp>
-        <p:nvSpPr>
-          <p:cNvPr id="8" name="Text 6"/>
-          <p:cNvSpPr txBox="1"/>
-          <p:nvPr/>
-        </p:nvSpPr>
-        <p:spPr>
-          <a:xfrm>
-            <a:off x="11155680" y="6446520"/>
-            <a:ext cx="457200" cy="292608"/>
-          </a:xfrm>
-          <a:prstGeom prst="rect">
-            <a:avLst/>
-          </a:prstGeom>
-          <a:noFill/>
-          <a:ln/>
-        </p:spPr>
-        <p:txBody>
-          <a:bodyPr wrap="square" lIns="0" tIns="0" rIns="0" bIns="0" rtlCol="0" anchor="ctr"/>
-          <a:lstStyle/>
-          <a:p>
-            <a:pPr algn="r" indent="0" marL="0">
-              <a:buNone/>
-            </a:pPr>
-            <a:r>
-              <a:rPr lang="en-US" sz="900" dirty="0">
-                <a:solidFill>
-                  <a:srgbClr val="5D5D72"/>
-                </a:solidFill>
-                <a:latin typeface="Calibri" pitchFamily="34" charset="0"/>
-                <a:ea typeface="Calibri" pitchFamily="34" charset="-122"/>
-                <a:cs typeface="Calibri" pitchFamily="34" charset="-120"/>
-              </a:rPr>
-              <a:t>20</a:t>
-            </a:r>
-            <a:endParaRPr lang="en-US" sz="900" dirty="0"/>
+          <p:cNvPr id="9" name="cuinotes-footer-mark"/>
+          <p:cNvSpPr txBox="1"/>
+          <p:nvPr/>
+        </p:nvSpPr>
+        <p:spPr>
+          <a:xfrm>
+            <a:off x="9951720" y="6455664"/>
+            <a:ext cx="2011680" cy="292608"/>
+          </a:xfrm>
+          <a:prstGeom prst="rect">
+            <a:avLst/>
+          </a:prstGeom>
+          <a:noFill/>
+        </p:spPr>
+        <p:txBody>
+          <a:bodyPr wrap="none" lIns="0" rIns="0" tIns="0" bIns="0">
+            <a:spAutoFit/>
+          </a:bodyPr>
+          <a:lstStyle/>
+          <a:p>
+            <a:pPr algn="r"/>
+            <a:r>
+              <a:rPr sz="1000">
+                <a:solidFill>
+                  <a:srgbClr val="8A939B"/>
+                </a:solidFill>
+                <a:hlinkClick r:id="rId3"/>
+              </a:rPr>
+              <a:t>cuinotes.com</a:t>
+            </a:r>
+            <a:r>
+              <a:rPr sz="1000">
+                <a:solidFill>
+                  <a:srgbClr val="8A939B"/>
+                </a:solidFill>
+              </a:rPr>
+              <a:t>  ·  20</a:t>
+            </a:r>
           </a:p>
         </p:txBody>
       </p:sp>
@@ -9451,6 +9124,10 @@
           </a:solidFill>
           <a:ln/>
         </p:spPr>
+        <p:txBody>
+          <a:bodyPr/>
+          <a:p/>
+        </p:txBody>
       </p:sp>
       <p:sp>
         <p:nvSpPr>
@@ -9667,6 +9344,10 @@
             </a:outerShdw>
           </a:effectLst>
         </p:spPr>
+        <p:txBody>
+          <a:bodyPr/>
+          <a:p/>
+        </p:txBody>
       </p:sp>
       <p:pic>
         <p:nvPicPr>
@@ -9694,79 +9375,44 @@
       </p:pic>
       <p:sp>
         <p:nvSpPr>
-          <p:cNvPr id="8" name="Text 5"/>
-          <p:cNvSpPr txBox="1"/>
-          <p:nvPr/>
-        </p:nvSpPr>
-        <p:spPr>
-          <a:xfrm>
-            <a:off x="640080" y="6446520"/>
-            <a:ext cx="8686800" cy="292608"/>
-          </a:xfrm>
-          <a:prstGeom prst="rect">
-            <a:avLst/>
-          </a:prstGeom>
-          <a:noFill/>
-          <a:ln/>
-        </p:spPr>
-        <p:txBody>
-          <a:bodyPr wrap="square" lIns="0" tIns="0" rIns="0" bIns="0" rtlCol="0" anchor="ctr"/>
-          <a:lstStyle/>
-          <a:p>
-            <a:pPr algn="l" indent="0" marL="0">
-              <a:buNone/>
-            </a:pPr>
-            <a:r>
-              <a:rPr lang="en-US" sz="900" dirty="0">
-                <a:solidFill>
-                  <a:srgbClr val="5D5D72"/>
-                </a:solidFill>
-                <a:latin typeface="Calibri" pitchFamily="34" charset="0"/>
-                <a:ea typeface="Calibri" pitchFamily="34" charset="-122"/>
-                <a:cs typeface="Calibri" pitchFamily="34" charset="-120"/>
-              </a:rPr>
-              <a:t>Usman Akram  •  COMSATS University Islamabad</a:t>
-            </a:r>
-            <a:endParaRPr lang="en-US" sz="900" dirty="0"/>
-          </a:p>
-        </p:txBody>
-      </p:sp>
-      <p:sp>
-        <p:nvSpPr>
-          <p:cNvPr id="9" name="Text 6"/>
-          <p:cNvSpPr txBox="1"/>
-          <p:nvPr/>
-        </p:nvSpPr>
-        <p:spPr>
-          <a:xfrm>
-            <a:off x="11155680" y="6446520"/>
-            <a:ext cx="457200" cy="292608"/>
-          </a:xfrm>
-          <a:prstGeom prst="rect">
-            <a:avLst/>
-          </a:prstGeom>
-          <a:noFill/>
-          <a:ln/>
-        </p:spPr>
-        <p:txBody>
-          <a:bodyPr wrap="square" lIns="0" tIns="0" rIns="0" bIns="0" rtlCol="0" anchor="ctr"/>
-          <a:lstStyle/>
-          <a:p>
-            <a:pPr algn="r" indent="0" marL="0">
-              <a:buNone/>
-            </a:pPr>
-            <a:r>
-              <a:rPr lang="en-US" sz="900" dirty="0">
-                <a:solidFill>
-                  <a:srgbClr val="5D5D72"/>
-                </a:solidFill>
-                <a:latin typeface="Calibri" pitchFamily="34" charset="0"/>
-                <a:ea typeface="Calibri" pitchFamily="34" charset="-122"/>
-                <a:cs typeface="Calibri" pitchFamily="34" charset="-120"/>
-              </a:rPr>
-              <a:t>21</a:t>
-            </a:r>
-            <a:endParaRPr lang="en-US" sz="900" dirty="0"/>
+          <p:cNvPr id="10" name="cuinotes-footer-mark"/>
+          <p:cNvSpPr txBox="1"/>
+          <p:nvPr/>
+        </p:nvSpPr>
+        <p:spPr>
+          <a:xfrm>
+            <a:off x="9951720" y="6455664"/>
+            <a:ext cx="2011680" cy="292608"/>
+          </a:xfrm>
+          <a:prstGeom prst="rect">
+            <a:avLst/>
+          </a:prstGeom>
+          <a:noFill/>
+        </p:spPr>
+        <p:txBody>
+          <a:bodyPr wrap="none" lIns="0" rIns="0" tIns="0" bIns="0">
+            <a:spAutoFit/>
+          </a:bodyPr>
+          <a:lstStyle/>
+          <a:p>
+            <a:pPr algn="r"/>
+            <a:r>
+              <a:rPr sz="1000">
+                <a:solidFill>
+                  <a:srgbClr val="8A939B"/>
+                </a:solidFill>
+                <a:hlinkClick r:id="rId4"/>
+              </a:rPr>
+              <a:t>cuinotes.com</a:t>
+            </a:r>
+            <a:r>
+              <a:rPr sz="1000">
+                <a:solidFill>
+                  <a:srgbClr val="8A939B"/>
+                </a:solidFill>
+              </a:rPr>
+              <a:t>  ·  21</a:t>
+            </a:r>
           </a:p>
         </p:txBody>
       </p:sp>
@@ -9906,6 +9552,10 @@
             <a:prstDash val="solid"/>
           </a:ln>
         </p:spPr>
+        <p:txBody>
+          <a:bodyPr/>
+          <a:p/>
+        </p:txBody>
       </p:sp>
       <p:sp>
         <p:nvSpPr>
@@ -9987,79 +9637,44 @@
       </p:sp>
       <p:sp>
         <p:nvSpPr>
-          <p:cNvPr id="7" name="Text 5"/>
-          <p:cNvSpPr txBox="1"/>
-          <p:nvPr/>
-        </p:nvSpPr>
-        <p:spPr>
-          <a:xfrm>
-            <a:off x="640080" y="6446520"/>
-            <a:ext cx="8686800" cy="292608"/>
-          </a:xfrm>
-          <a:prstGeom prst="rect">
-            <a:avLst/>
-          </a:prstGeom>
-          <a:noFill/>
-          <a:ln/>
-        </p:spPr>
-        <p:txBody>
-          <a:bodyPr wrap="square" lIns="0" tIns="0" rIns="0" bIns="0" rtlCol="0" anchor="ctr"/>
-          <a:lstStyle/>
-          <a:p>
-            <a:pPr algn="l" indent="0" marL="0">
-              <a:buNone/>
-            </a:pPr>
-            <a:r>
-              <a:rPr lang="en-US" sz="900" dirty="0">
-                <a:solidFill>
-                  <a:srgbClr val="5D5D72"/>
-                </a:solidFill>
-                <a:latin typeface="Calibri" pitchFamily="34" charset="0"/>
-                <a:ea typeface="Calibri" pitchFamily="34" charset="-122"/>
-                <a:cs typeface="Calibri" pitchFamily="34" charset="-120"/>
-              </a:rPr>
-              <a:t>Usman Akram  •  COMSATS University Islamabad</a:t>
-            </a:r>
-            <a:endParaRPr lang="en-US" sz="900" dirty="0"/>
-          </a:p>
-        </p:txBody>
-      </p:sp>
-      <p:sp>
-        <p:nvSpPr>
-          <p:cNvPr id="8" name="Text 6"/>
-          <p:cNvSpPr txBox="1"/>
-          <p:nvPr/>
-        </p:nvSpPr>
-        <p:spPr>
-          <a:xfrm>
-            <a:off x="11155680" y="6446520"/>
-            <a:ext cx="457200" cy="292608"/>
-          </a:xfrm>
-          <a:prstGeom prst="rect">
-            <a:avLst/>
-          </a:prstGeom>
-          <a:noFill/>
-          <a:ln/>
-        </p:spPr>
-        <p:txBody>
-          <a:bodyPr wrap="square" lIns="0" tIns="0" rIns="0" bIns="0" rtlCol="0" anchor="ctr"/>
-          <a:lstStyle/>
-          <a:p>
-            <a:pPr algn="r" indent="0" marL="0">
-              <a:buNone/>
-            </a:pPr>
-            <a:r>
-              <a:rPr lang="en-US" sz="900" dirty="0">
-                <a:solidFill>
-                  <a:srgbClr val="5D5D72"/>
-                </a:solidFill>
-                <a:latin typeface="Calibri" pitchFamily="34" charset="0"/>
-                <a:ea typeface="Calibri" pitchFamily="34" charset="-122"/>
-                <a:cs typeface="Calibri" pitchFamily="34" charset="-120"/>
-              </a:rPr>
-              <a:t>22</a:t>
-            </a:r>
-            <a:endParaRPr lang="en-US" sz="900" dirty="0"/>
+          <p:cNvPr id="9" name="cuinotes-footer-mark"/>
+          <p:cNvSpPr txBox="1"/>
+          <p:nvPr/>
+        </p:nvSpPr>
+        <p:spPr>
+          <a:xfrm>
+            <a:off x="9951720" y="6455664"/>
+            <a:ext cx="2011680" cy="292608"/>
+          </a:xfrm>
+          <a:prstGeom prst="rect">
+            <a:avLst/>
+          </a:prstGeom>
+          <a:noFill/>
+        </p:spPr>
+        <p:txBody>
+          <a:bodyPr wrap="none" lIns="0" rIns="0" tIns="0" bIns="0">
+            <a:spAutoFit/>
+          </a:bodyPr>
+          <a:lstStyle/>
+          <a:p>
+            <a:pPr algn="r"/>
+            <a:r>
+              <a:rPr sz="1000">
+                <a:solidFill>
+                  <a:srgbClr val="8A939B"/>
+                </a:solidFill>
+                <a:hlinkClick r:id="rId3"/>
+              </a:rPr>
+              <a:t>cuinotes.com</a:t>
+            </a:r>
+            <a:r>
+              <a:rPr sz="1000">
+                <a:solidFill>
+                  <a:srgbClr val="8A939B"/>
+                </a:solidFill>
+              </a:rPr>
+              <a:t>  ·  22</a:t>
+            </a:r>
           </a:p>
         </p:txBody>
       </p:sp>
@@ -10194,6 +9809,10 @@
           </a:solidFill>
           <a:ln/>
         </p:spPr>
+        <p:txBody>
+          <a:bodyPr/>
+          <a:p/>
+        </p:txBody>
       </p:sp>
       <p:sp>
         <p:nvSpPr>
@@ -10387,79 +10006,44 @@
       </p:sp>
       <p:sp>
         <p:nvSpPr>
-          <p:cNvPr id="7" name="Text 5"/>
-          <p:cNvSpPr txBox="1"/>
-          <p:nvPr/>
-        </p:nvSpPr>
-        <p:spPr>
-          <a:xfrm>
-            <a:off x="640080" y="6446520"/>
-            <a:ext cx="8686800" cy="292608"/>
-          </a:xfrm>
-          <a:prstGeom prst="rect">
-            <a:avLst/>
-          </a:prstGeom>
-          <a:noFill/>
-          <a:ln/>
-        </p:spPr>
-        <p:txBody>
-          <a:bodyPr wrap="square" lIns="0" tIns="0" rIns="0" bIns="0" rtlCol="0" anchor="ctr"/>
-          <a:lstStyle/>
-          <a:p>
-            <a:pPr algn="l" indent="0" marL="0">
-              <a:buNone/>
-            </a:pPr>
-            <a:r>
-              <a:rPr lang="en-US" sz="900" dirty="0">
-                <a:solidFill>
-                  <a:srgbClr val="5D5D72"/>
-                </a:solidFill>
-                <a:latin typeface="Calibri" pitchFamily="34" charset="0"/>
-                <a:ea typeface="Calibri" pitchFamily="34" charset="-122"/>
-                <a:cs typeface="Calibri" pitchFamily="34" charset="-120"/>
-              </a:rPr>
-              <a:t>Usman Akram  •  COMSATS University Islamabad</a:t>
-            </a:r>
-            <a:endParaRPr lang="en-US" sz="900" dirty="0"/>
-          </a:p>
-        </p:txBody>
-      </p:sp>
-      <p:sp>
-        <p:nvSpPr>
-          <p:cNvPr id="8" name="Text 6"/>
-          <p:cNvSpPr txBox="1"/>
-          <p:nvPr/>
-        </p:nvSpPr>
-        <p:spPr>
-          <a:xfrm>
-            <a:off x="11155680" y="6446520"/>
-            <a:ext cx="457200" cy="292608"/>
-          </a:xfrm>
-          <a:prstGeom prst="rect">
-            <a:avLst/>
-          </a:prstGeom>
-          <a:noFill/>
-          <a:ln/>
-        </p:spPr>
-        <p:txBody>
-          <a:bodyPr wrap="square" lIns="0" tIns="0" rIns="0" bIns="0" rtlCol="0" anchor="ctr"/>
-          <a:lstStyle/>
-          <a:p>
-            <a:pPr algn="r" indent="0" marL="0">
-              <a:buNone/>
-            </a:pPr>
-            <a:r>
-              <a:rPr lang="en-US" sz="900" dirty="0">
-                <a:solidFill>
-                  <a:srgbClr val="5D5D72"/>
-                </a:solidFill>
-                <a:latin typeface="Calibri" pitchFamily="34" charset="0"/>
-                <a:ea typeface="Calibri" pitchFamily="34" charset="-122"/>
-                <a:cs typeface="Calibri" pitchFamily="34" charset="-120"/>
-              </a:rPr>
-              <a:t>23</a:t>
-            </a:r>
-            <a:endParaRPr lang="en-US" sz="900" dirty="0"/>
+          <p:cNvPr id="9" name="cuinotes-footer-mark"/>
+          <p:cNvSpPr txBox="1"/>
+          <p:nvPr/>
+        </p:nvSpPr>
+        <p:spPr>
+          <a:xfrm>
+            <a:off x="9951720" y="6455664"/>
+            <a:ext cx="2011680" cy="292608"/>
+          </a:xfrm>
+          <a:prstGeom prst="rect">
+            <a:avLst/>
+          </a:prstGeom>
+          <a:noFill/>
+        </p:spPr>
+        <p:txBody>
+          <a:bodyPr wrap="none" lIns="0" rIns="0" tIns="0" bIns="0">
+            <a:spAutoFit/>
+          </a:bodyPr>
+          <a:lstStyle/>
+          <a:p>
+            <a:pPr algn="r"/>
+            <a:r>
+              <a:rPr sz="1000">
+                <a:solidFill>
+                  <a:srgbClr val="8A939B"/>
+                </a:solidFill>
+                <a:hlinkClick r:id="rId3"/>
+              </a:rPr>
+              <a:t>cuinotes.com</a:t>
+            </a:r>
+            <a:r>
+              <a:rPr sz="1000">
+                <a:solidFill>
+                  <a:srgbClr val="8A939B"/>
+                </a:solidFill>
+              </a:rPr>
+              <a:t>  ·  23</a:t>
+            </a:r>
           </a:p>
         </p:txBody>
       </p:sp>
@@ -10599,6 +10183,10 @@
             <a:prstDash val="solid"/>
           </a:ln>
         </p:spPr>
+        <p:txBody>
+          <a:bodyPr/>
+          <a:p/>
+        </p:txBody>
       </p:sp>
       <p:sp>
         <p:nvSpPr>
@@ -10680,79 +10268,44 @@
       </p:sp>
       <p:sp>
         <p:nvSpPr>
-          <p:cNvPr id="7" name="Text 5"/>
-          <p:cNvSpPr txBox="1"/>
-          <p:nvPr/>
-        </p:nvSpPr>
-        <p:spPr>
-          <a:xfrm>
-            <a:off x="640080" y="6446520"/>
-            <a:ext cx="8686800" cy="292608"/>
-          </a:xfrm>
-          <a:prstGeom prst="rect">
-            <a:avLst/>
-          </a:prstGeom>
-          <a:noFill/>
-          <a:ln/>
-        </p:spPr>
-        <p:txBody>
-          <a:bodyPr wrap="square" lIns="0" tIns="0" rIns="0" bIns="0" rtlCol="0" anchor="ctr"/>
-          <a:lstStyle/>
-          <a:p>
-            <a:pPr algn="l" indent="0" marL="0">
-              <a:buNone/>
-            </a:pPr>
-            <a:r>
-              <a:rPr lang="en-US" sz="900" dirty="0">
-                <a:solidFill>
-                  <a:srgbClr val="5D5D72"/>
-                </a:solidFill>
-                <a:latin typeface="Calibri" pitchFamily="34" charset="0"/>
-                <a:ea typeface="Calibri" pitchFamily="34" charset="-122"/>
-                <a:cs typeface="Calibri" pitchFamily="34" charset="-120"/>
-              </a:rPr>
-              <a:t>Usman Akram  •  COMSATS University Islamabad</a:t>
-            </a:r>
-            <a:endParaRPr lang="en-US" sz="900" dirty="0"/>
-          </a:p>
-        </p:txBody>
-      </p:sp>
-      <p:sp>
-        <p:nvSpPr>
-          <p:cNvPr id="8" name="Text 6"/>
-          <p:cNvSpPr txBox="1"/>
-          <p:nvPr/>
-        </p:nvSpPr>
-        <p:spPr>
-          <a:xfrm>
-            <a:off x="11155680" y="6446520"/>
-            <a:ext cx="457200" cy="292608"/>
-          </a:xfrm>
-          <a:prstGeom prst="rect">
-            <a:avLst/>
-          </a:prstGeom>
-          <a:noFill/>
-          <a:ln/>
-        </p:spPr>
-        <p:txBody>
-          <a:bodyPr wrap="square" lIns="0" tIns="0" rIns="0" bIns="0" rtlCol="0" anchor="ctr"/>
-          <a:lstStyle/>
-          <a:p>
-            <a:pPr algn="r" indent="0" marL="0">
-              <a:buNone/>
-            </a:pPr>
-            <a:r>
-              <a:rPr lang="en-US" sz="900" dirty="0">
-                <a:solidFill>
-                  <a:srgbClr val="5D5D72"/>
-                </a:solidFill>
-                <a:latin typeface="Calibri" pitchFamily="34" charset="0"/>
-                <a:ea typeface="Calibri" pitchFamily="34" charset="-122"/>
-                <a:cs typeface="Calibri" pitchFamily="34" charset="-120"/>
-              </a:rPr>
-              <a:t>24</a:t>
-            </a:r>
-            <a:endParaRPr lang="en-US" sz="900" dirty="0"/>
+          <p:cNvPr id="9" name="cuinotes-footer-mark"/>
+          <p:cNvSpPr txBox="1"/>
+          <p:nvPr/>
+        </p:nvSpPr>
+        <p:spPr>
+          <a:xfrm>
+            <a:off x="9951720" y="6455664"/>
+            <a:ext cx="2011680" cy="292608"/>
+          </a:xfrm>
+          <a:prstGeom prst="rect">
+            <a:avLst/>
+          </a:prstGeom>
+          <a:noFill/>
+        </p:spPr>
+        <p:txBody>
+          <a:bodyPr wrap="none" lIns="0" rIns="0" tIns="0" bIns="0">
+            <a:spAutoFit/>
+          </a:bodyPr>
+          <a:lstStyle/>
+          <a:p>
+            <a:pPr algn="r"/>
+            <a:r>
+              <a:rPr sz="1000">
+                <a:solidFill>
+                  <a:srgbClr val="8A939B"/>
+                </a:solidFill>
+                <a:hlinkClick r:id="rId3"/>
+              </a:rPr>
+              <a:t>cuinotes.com</a:t>
+            </a:r>
+            <a:r>
+              <a:rPr sz="1000">
+                <a:solidFill>
+                  <a:srgbClr val="8A939B"/>
+                </a:solidFill>
+              </a:rPr>
+              <a:t>  ·  24</a:t>
+            </a:r>
           </a:p>
         </p:txBody>
       </p:sp>
@@ -10885,6 +10438,10 @@
           </a:solidFill>
           <a:ln/>
         </p:spPr>
+        <p:txBody>
+          <a:bodyPr/>
+          <a:p/>
+        </p:txBody>
       </p:sp>
       <p:sp>
         <p:nvSpPr>
@@ -10983,6 +10540,10 @@
           </a:solidFill>
           <a:ln/>
         </p:spPr>
+        <p:txBody>
+          <a:bodyPr/>
+          <a:p/>
+        </p:txBody>
       </p:sp>
       <p:sp>
         <p:nvSpPr>
@@ -11081,6 +10642,10 @@
           </a:solidFill>
           <a:ln/>
         </p:spPr>
+        <p:txBody>
+          <a:bodyPr/>
+          <a:p/>
+        </p:txBody>
       </p:sp>
       <p:sp>
         <p:nvSpPr>
@@ -11179,6 +10744,10 @@
           </a:solidFill>
           <a:ln/>
         </p:spPr>
+        <p:txBody>
+          <a:bodyPr/>
+          <a:p/>
+        </p:txBody>
       </p:sp>
       <p:sp>
         <p:nvSpPr>
@@ -11277,6 +10846,10 @@
           </a:solidFill>
           <a:ln/>
         </p:spPr>
+        <p:txBody>
+          <a:bodyPr/>
+          <a:p/>
+        </p:txBody>
       </p:sp>
       <p:sp>
         <p:nvSpPr>
@@ -11375,6 +10948,10 @@
           </a:solidFill>
           <a:ln/>
         </p:spPr>
+        <p:txBody>
+          <a:bodyPr/>
+          <a:p/>
+        </p:txBody>
       </p:sp>
       <p:sp>
         <p:nvSpPr>
@@ -11473,6 +11050,10 @@
           </a:solidFill>
           <a:ln/>
         </p:spPr>
+        <p:txBody>
+          <a:bodyPr/>
+          <a:p/>
+        </p:txBody>
       </p:sp>
       <p:sp>
         <p:nvSpPr>
@@ -11554,79 +11135,44 @@
       </p:sp>
       <p:sp>
         <p:nvSpPr>
-          <p:cNvPr id="25" name="Text 23"/>
-          <p:cNvSpPr txBox="1"/>
-          <p:nvPr/>
-        </p:nvSpPr>
-        <p:spPr>
-          <a:xfrm>
-            <a:off x="640080" y="6446520"/>
-            <a:ext cx="8686800" cy="292608"/>
-          </a:xfrm>
-          <a:prstGeom prst="rect">
-            <a:avLst/>
-          </a:prstGeom>
-          <a:noFill/>
-          <a:ln/>
-        </p:spPr>
-        <p:txBody>
-          <a:bodyPr wrap="square" lIns="0" tIns="0" rIns="0" bIns="0" rtlCol="0" anchor="ctr"/>
-          <a:lstStyle/>
-          <a:p>
-            <a:pPr algn="l" indent="0" marL="0">
-              <a:buNone/>
-            </a:pPr>
-            <a:r>
-              <a:rPr lang="en-US" sz="900" dirty="0">
-                <a:solidFill>
-                  <a:srgbClr val="9AA3D8"/>
-                </a:solidFill>
-                <a:latin typeface="Calibri" pitchFamily="34" charset="0"/>
-                <a:ea typeface="Calibri" pitchFamily="34" charset="-122"/>
-                <a:cs typeface="Calibri" pitchFamily="34" charset="-120"/>
-              </a:rPr>
-              <a:t>Usman Akram  •  COMSATS University Islamabad</a:t>
-            </a:r>
-            <a:endParaRPr lang="en-US" sz="900" dirty="0"/>
-          </a:p>
-        </p:txBody>
-      </p:sp>
-      <p:sp>
-        <p:nvSpPr>
-          <p:cNvPr id="26" name="Text 24"/>
-          <p:cNvSpPr txBox="1"/>
-          <p:nvPr/>
-        </p:nvSpPr>
-        <p:spPr>
-          <a:xfrm>
-            <a:off x="11155680" y="6446520"/>
-            <a:ext cx="457200" cy="292608"/>
-          </a:xfrm>
-          <a:prstGeom prst="rect">
-            <a:avLst/>
-          </a:prstGeom>
-          <a:noFill/>
-          <a:ln/>
-        </p:spPr>
-        <p:txBody>
-          <a:bodyPr wrap="square" lIns="0" tIns="0" rIns="0" bIns="0" rtlCol="0" anchor="ctr"/>
-          <a:lstStyle/>
-          <a:p>
-            <a:pPr algn="r" indent="0" marL="0">
-              <a:buNone/>
-            </a:pPr>
-            <a:r>
-              <a:rPr lang="en-US" sz="900" dirty="0">
-                <a:solidFill>
-                  <a:srgbClr val="9AA3D8"/>
-                </a:solidFill>
-                <a:latin typeface="Calibri" pitchFamily="34" charset="0"/>
-                <a:ea typeface="Calibri" pitchFamily="34" charset="-122"/>
-                <a:cs typeface="Calibri" pitchFamily="34" charset="-120"/>
-              </a:rPr>
-              <a:t>25</a:t>
-            </a:r>
-            <a:endParaRPr lang="en-US" sz="900" dirty="0"/>
+          <p:cNvPr id="27" name="cuinotes-footer-mark"/>
+          <p:cNvSpPr txBox="1"/>
+          <p:nvPr/>
+        </p:nvSpPr>
+        <p:spPr>
+          <a:xfrm>
+            <a:off x="9951720" y="6455664"/>
+            <a:ext cx="2011680" cy="292608"/>
+          </a:xfrm>
+          <a:prstGeom prst="rect">
+            <a:avLst/>
+          </a:prstGeom>
+          <a:noFill/>
+        </p:spPr>
+        <p:txBody>
+          <a:bodyPr wrap="none" lIns="0" rIns="0" tIns="0" bIns="0">
+            <a:spAutoFit/>
+          </a:bodyPr>
+          <a:lstStyle/>
+          <a:p>
+            <a:pPr algn="r"/>
+            <a:r>
+              <a:rPr sz="1000">
+                <a:solidFill>
+                  <a:srgbClr val="8A939B"/>
+                </a:solidFill>
+                <a:hlinkClick r:id="rId3"/>
+              </a:rPr>
+              <a:t>cuinotes.com</a:t>
+            </a:r>
+            <a:r>
+              <a:rPr sz="1000">
+                <a:solidFill>
+                  <a:srgbClr val="8A939B"/>
+                </a:solidFill>
+              </a:rPr>
+              <a:t>  ·  25</a:t>
+            </a:r>
           </a:p>
         </p:txBody>
       </p:sp>
@@ -11761,6 +11307,10 @@
           </a:solidFill>
           <a:ln/>
         </p:spPr>
+        <p:txBody>
+          <a:bodyPr/>
+          <a:p/>
+        </p:txBody>
       </p:sp>
       <p:sp>
         <p:nvSpPr>
@@ -11965,79 +11515,44 @@
       </p:sp>
       <p:sp>
         <p:nvSpPr>
-          <p:cNvPr id="7" name="Text 5"/>
-          <p:cNvSpPr txBox="1"/>
-          <p:nvPr/>
-        </p:nvSpPr>
-        <p:spPr>
-          <a:xfrm>
-            <a:off x="640080" y="6446520"/>
-            <a:ext cx="8686800" cy="292608"/>
-          </a:xfrm>
-          <a:prstGeom prst="rect">
-            <a:avLst/>
-          </a:prstGeom>
-          <a:noFill/>
-          <a:ln/>
-        </p:spPr>
-        <p:txBody>
-          <a:bodyPr wrap="square" lIns="0" tIns="0" rIns="0" bIns="0" rtlCol="0" anchor="ctr"/>
-          <a:lstStyle/>
-          <a:p>
-            <a:pPr algn="l" indent="0" marL="0">
-              <a:buNone/>
-            </a:pPr>
-            <a:r>
-              <a:rPr lang="en-US" sz="900" dirty="0">
-                <a:solidFill>
-                  <a:srgbClr val="5D5D72"/>
-                </a:solidFill>
-                <a:latin typeface="Calibri" pitchFamily="34" charset="0"/>
-                <a:ea typeface="Calibri" pitchFamily="34" charset="-122"/>
-                <a:cs typeface="Calibri" pitchFamily="34" charset="-120"/>
-              </a:rPr>
-              <a:t>Usman Akram  •  COMSATS University Islamabad</a:t>
-            </a:r>
-            <a:endParaRPr lang="en-US" sz="900" dirty="0"/>
-          </a:p>
-        </p:txBody>
-      </p:sp>
-      <p:sp>
-        <p:nvSpPr>
-          <p:cNvPr id="8" name="Text 6"/>
-          <p:cNvSpPr txBox="1"/>
-          <p:nvPr/>
-        </p:nvSpPr>
-        <p:spPr>
-          <a:xfrm>
-            <a:off x="11155680" y="6446520"/>
-            <a:ext cx="457200" cy="292608"/>
-          </a:xfrm>
-          <a:prstGeom prst="rect">
-            <a:avLst/>
-          </a:prstGeom>
-          <a:noFill/>
-          <a:ln/>
-        </p:spPr>
-        <p:txBody>
-          <a:bodyPr wrap="square" lIns="0" tIns="0" rIns="0" bIns="0" rtlCol="0" anchor="ctr"/>
-          <a:lstStyle/>
-          <a:p>
-            <a:pPr algn="r" indent="0" marL="0">
-              <a:buNone/>
-            </a:pPr>
-            <a:r>
-              <a:rPr lang="en-US" sz="900" dirty="0">
-                <a:solidFill>
-                  <a:srgbClr val="5D5D72"/>
-                </a:solidFill>
-                <a:latin typeface="Calibri" pitchFamily="34" charset="0"/>
-                <a:ea typeface="Calibri" pitchFamily="34" charset="-122"/>
-                <a:cs typeface="Calibri" pitchFamily="34" charset="-120"/>
-              </a:rPr>
-              <a:t>3</a:t>
-            </a:r>
-            <a:endParaRPr lang="en-US" sz="900" dirty="0"/>
+          <p:cNvPr id="9" name="cuinotes-footer-mark"/>
+          <p:cNvSpPr txBox="1"/>
+          <p:nvPr/>
+        </p:nvSpPr>
+        <p:spPr>
+          <a:xfrm>
+            <a:off x="9951720" y="6455664"/>
+            <a:ext cx="2011680" cy="292608"/>
+          </a:xfrm>
+          <a:prstGeom prst="rect">
+            <a:avLst/>
+          </a:prstGeom>
+          <a:noFill/>
+        </p:spPr>
+        <p:txBody>
+          <a:bodyPr wrap="none" lIns="0" rIns="0" tIns="0" bIns="0">
+            <a:spAutoFit/>
+          </a:bodyPr>
+          <a:lstStyle/>
+          <a:p>
+            <a:pPr algn="r"/>
+            <a:r>
+              <a:rPr sz="1000">
+                <a:solidFill>
+                  <a:srgbClr val="8A939B"/>
+                </a:solidFill>
+                <a:hlinkClick r:id="rId3"/>
+              </a:rPr>
+              <a:t>cuinotes.com</a:t>
+            </a:r>
+            <a:r>
+              <a:rPr sz="1000">
+                <a:solidFill>
+                  <a:srgbClr val="8A939B"/>
+                </a:solidFill>
+              </a:rPr>
+              <a:t>  ·  3</a:t>
+            </a:r>
           </a:p>
         </p:txBody>
       </p:sp>
@@ -12174,6 +11689,10 @@
             <a:tailEnd type="triangle"/>
           </a:ln>
         </p:spPr>
+        <p:txBody>
+          <a:bodyPr/>
+          <a:p/>
+        </p:txBody>
       </p:sp>
       <p:sp>
         <p:nvSpPr>
@@ -12198,6 +11717,10 @@
             <a:tailEnd type="triangle"/>
           </a:ln>
         </p:spPr>
+        <p:txBody>
+          <a:bodyPr/>
+          <a:p/>
+        </p:txBody>
       </p:sp>
       <p:sp>
         <p:nvSpPr>
@@ -12222,6 +11745,10 @@
             <a:tailEnd type="triangle"/>
           </a:ln>
         </p:spPr>
+        <p:txBody>
+          <a:bodyPr/>
+          <a:p/>
+        </p:txBody>
       </p:sp>
       <p:sp>
         <p:nvSpPr>
@@ -12246,6 +11773,10 @@
             <a:tailEnd type="triangle"/>
           </a:ln>
         </p:spPr>
+        <p:txBody>
+          <a:bodyPr/>
+          <a:p/>
+        </p:txBody>
       </p:sp>
       <p:sp>
         <p:nvSpPr>
@@ -12270,6 +11801,10 @@
             <a:tailEnd type="triangle"/>
           </a:ln>
         </p:spPr>
+        <p:txBody>
+          <a:bodyPr/>
+          <a:p/>
+        </p:txBody>
       </p:sp>
       <p:sp>
         <p:nvSpPr>
@@ -12294,6 +11829,10 @@
             <a:tailEnd type="triangle"/>
           </a:ln>
         </p:spPr>
+        <p:txBody>
+          <a:bodyPr/>
+          <a:p/>
+        </p:txBody>
       </p:sp>
       <p:sp>
         <p:nvSpPr>
@@ -12314,6 +11853,10 @@
           </a:solidFill>
           <a:ln/>
         </p:spPr>
+        <p:txBody>
+          <a:bodyPr/>
+          <a:p/>
+        </p:txBody>
       </p:sp>
       <p:sp>
         <p:nvSpPr>
@@ -12376,6 +11919,10 @@
           </a:solidFill>
           <a:ln/>
         </p:spPr>
+        <p:txBody>
+          <a:bodyPr/>
+          <a:p/>
+        </p:txBody>
       </p:sp>
       <p:sp>
         <p:nvSpPr>
@@ -12438,6 +11985,10 @@
           </a:solidFill>
           <a:ln/>
         </p:spPr>
+        <p:txBody>
+          <a:bodyPr/>
+          <a:p/>
+        </p:txBody>
       </p:sp>
       <p:sp>
         <p:nvSpPr>
@@ -12500,6 +12051,10 @@
           </a:solidFill>
           <a:ln/>
         </p:spPr>
+        <p:txBody>
+          <a:bodyPr/>
+          <a:p/>
+        </p:txBody>
       </p:sp>
       <p:sp>
         <p:nvSpPr>
@@ -12562,6 +12117,10 @@
           </a:solidFill>
           <a:ln/>
         </p:spPr>
+        <p:txBody>
+          <a:bodyPr/>
+          <a:p/>
+        </p:txBody>
       </p:sp>
       <p:sp>
         <p:nvSpPr>
@@ -12624,6 +12183,10 @@
           </a:solidFill>
           <a:ln/>
         </p:spPr>
+        <p:txBody>
+          <a:bodyPr/>
+          <a:p/>
+        </p:txBody>
       </p:sp>
       <p:sp>
         <p:nvSpPr>
@@ -12686,6 +12249,10 @@
           </a:solidFill>
           <a:ln/>
         </p:spPr>
+        <p:txBody>
+          <a:bodyPr/>
+          <a:p/>
+        </p:txBody>
       </p:sp>
       <p:sp>
         <p:nvSpPr>
@@ -12770,79 +12337,44 @@
       </p:sp>
       <p:sp>
         <p:nvSpPr>
-          <p:cNvPr id="25" name="Text 23"/>
-          <p:cNvSpPr txBox="1"/>
-          <p:nvPr/>
-        </p:nvSpPr>
-        <p:spPr>
-          <a:xfrm>
-            <a:off x="640080" y="6446520"/>
-            <a:ext cx="8686800" cy="292608"/>
-          </a:xfrm>
-          <a:prstGeom prst="rect">
-            <a:avLst/>
-          </a:prstGeom>
-          <a:noFill/>
-          <a:ln/>
-        </p:spPr>
-        <p:txBody>
-          <a:bodyPr wrap="square" lIns="0" tIns="0" rIns="0" bIns="0" rtlCol="0" anchor="ctr"/>
-          <a:lstStyle/>
-          <a:p>
-            <a:pPr algn="l" indent="0" marL="0">
-              <a:buNone/>
-            </a:pPr>
-            <a:r>
-              <a:rPr lang="en-US" sz="900" dirty="0">
-                <a:solidFill>
-                  <a:srgbClr val="5D5D72"/>
-                </a:solidFill>
-                <a:latin typeface="Calibri" pitchFamily="34" charset="0"/>
-                <a:ea typeface="Calibri" pitchFamily="34" charset="-122"/>
-                <a:cs typeface="Calibri" pitchFamily="34" charset="-120"/>
-              </a:rPr>
-              <a:t>Usman Akram  •  COMSATS University Islamabad</a:t>
-            </a:r>
-            <a:endParaRPr lang="en-US" sz="900" dirty="0"/>
-          </a:p>
-        </p:txBody>
-      </p:sp>
-      <p:sp>
-        <p:nvSpPr>
-          <p:cNvPr id="26" name="Text 24"/>
-          <p:cNvSpPr txBox="1"/>
-          <p:nvPr/>
-        </p:nvSpPr>
-        <p:spPr>
-          <a:xfrm>
-            <a:off x="11155680" y="6446520"/>
-            <a:ext cx="457200" cy="292608"/>
-          </a:xfrm>
-          <a:prstGeom prst="rect">
-            <a:avLst/>
-          </a:prstGeom>
-          <a:noFill/>
-          <a:ln/>
-        </p:spPr>
-        <p:txBody>
-          <a:bodyPr wrap="square" lIns="0" tIns="0" rIns="0" bIns="0" rtlCol="0" anchor="ctr"/>
-          <a:lstStyle/>
-          <a:p>
-            <a:pPr algn="r" indent="0" marL="0">
-              <a:buNone/>
-            </a:pPr>
-            <a:r>
-              <a:rPr lang="en-US" sz="900" dirty="0">
-                <a:solidFill>
-                  <a:srgbClr val="5D5D72"/>
-                </a:solidFill>
-                <a:latin typeface="Calibri" pitchFamily="34" charset="0"/>
-                <a:ea typeface="Calibri" pitchFamily="34" charset="-122"/>
-                <a:cs typeface="Calibri" pitchFamily="34" charset="-120"/>
-              </a:rPr>
-              <a:t>4</a:t>
-            </a:r>
-            <a:endParaRPr lang="en-US" sz="900" dirty="0"/>
+          <p:cNvPr id="27" name="cuinotes-footer-mark"/>
+          <p:cNvSpPr txBox="1"/>
+          <p:nvPr/>
+        </p:nvSpPr>
+        <p:spPr>
+          <a:xfrm>
+            <a:off x="9951720" y="6455664"/>
+            <a:ext cx="2011680" cy="292608"/>
+          </a:xfrm>
+          <a:prstGeom prst="rect">
+            <a:avLst/>
+          </a:prstGeom>
+          <a:noFill/>
+        </p:spPr>
+        <p:txBody>
+          <a:bodyPr wrap="none" lIns="0" rIns="0" tIns="0" bIns="0">
+            <a:spAutoFit/>
+          </a:bodyPr>
+          <a:lstStyle/>
+          <a:p>
+            <a:pPr algn="r"/>
+            <a:r>
+              <a:rPr sz="1000">
+                <a:solidFill>
+                  <a:srgbClr val="8A939B"/>
+                </a:solidFill>
+                <a:hlinkClick r:id="rId3"/>
+              </a:rPr>
+              <a:t>cuinotes.com</a:t>
+            </a:r>
+            <a:r>
+              <a:rPr sz="1000">
+                <a:solidFill>
+                  <a:srgbClr val="8A939B"/>
+                </a:solidFill>
+              </a:rPr>
+              <a:t>  ·  4</a:t>
+            </a:r>
           </a:p>
         </p:txBody>
       </p:sp>
@@ -12982,6 +12514,10 @@
             <a:prstDash val="solid"/>
           </a:ln>
         </p:spPr>
+        <p:txBody>
+          <a:bodyPr/>
+          <a:p/>
+        </p:txBody>
       </p:sp>
       <p:sp>
         <p:nvSpPr>
@@ -13063,79 +12599,44 @@
       </p:sp>
       <p:sp>
         <p:nvSpPr>
-          <p:cNvPr id="7" name="Text 5"/>
-          <p:cNvSpPr txBox="1"/>
-          <p:nvPr/>
-        </p:nvSpPr>
-        <p:spPr>
-          <a:xfrm>
-            <a:off x="640080" y="6446520"/>
-            <a:ext cx="8686800" cy="292608"/>
-          </a:xfrm>
-          <a:prstGeom prst="rect">
-            <a:avLst/>
-          </a:prstGeom>
-          <a:noFill/>
-          <a:ln/>
-        </p:spPr>
-        <p:txBody>
-          <a:bodyPr wrap="square" lIns="0" tIns="0" rIns="0" bIns="0" rtlCol="0" anchor="ctr"/>
-          <a:lstStyle/>
-          <a:p>
-            <a:pPr algn="l" indent="0" marL="0">
-              <a:buNone/>
-            </a:pPr>
-            <a:r>
-              <a:rPr lang="en-US" sz="900" dirty="0">
-                <a:solidFill>
-                  <a:srgbClr val="5D5D72"/>
-                </a:solidFill>
-                <a:latin typeface="Calibri" pitchFamily="34" charset="0"/>
-                <a:ea typeface="Calibri" pitchFamily="34" charset="-122"/>
-                <a:cs typeface="Calibri" pitchFamily="34" charset="-120"/>
-              </a:rPr>
-              <a:t>Usman Akram  •  COMSATS University Islamabad</a:t>
-            </a:r>
-            <a:endParaRPr lang="en-US" sz="900" dirty="0"/>
-          </a:p>
-        </p:txBody>
-      </p:sp>
-      <p:sp>
-        <p:nvSpPr>
-          <p:cNvPr id="8" name="Text 6"/>
-          <p:cNvSpPr txBox="1"/>
-          <p:nvPr/>
-        </p:nvSpPr>
-        <p:spPr>
-          <a:xfrm>
-            <a:off x="11155680" y="6446520"/>
-            <a:ext cx="457200" cy="292608"/>
-          </a:xfrm>
-          <a:prstGeom prst="rect">
-            <a:avLst/>
-          </a:prstGeom>
-          <a:noFill/>
-          <a:ln/>
-        </p:spPr>
-        <p:txBody>
-          <a:bodyPr wrap="square" lIns="0" tIns="0" rIns="0" bIns="0" rtlCol="0" anchor="ctr"/>
-          <a:lstStyle/>
-          <a:p>
-            <a:pPr algn="r" indent="0" marL="0">
-              <a:buNone/>
-            </a:pPr>
-            <a:r>
-              <a:rPr lang="en-US" sz="900" dirty="0">
-                <a:solidFill>
-                  <a:srgbClr val="5D5D72"/>
-                </a:solidFill>
-                <a:latin typeface="Calibri" pitchFamily="34" charset="0"/>
-                <a:ea typeface="Calibri" pitchFamily="34" charset="-122"/>
-                <a:cs typeface="Calibri" pitchFamily="34" charset="-120"/>
-              </a:rPr>
-              <a:t>5</a:t>
-            </a:r>
-            <a:endParaRPr lang="en-US" sz="900" dirty="0"/>
+          <p:cNvPr id="9" name="cuinotes-footer-mark"/>
+          <p:cNvSpPr txBox="1"/>
+          <p:nvPr/>
+        </p:nvSpPr>
+        <p:spPr>
+          <a:xfrm>
+            <a:off x="9951720" y="6455664"/>
+            <a:ext cx="2011680" cy="292608"/>
+          </a:xfrm>
+          <a:prstGeom prst="rect">
+            <a:avLst/>
+          </a:prstGeom>
+          <a:noFill/>
+        </p:spPr>
+        <p:txBody>
+          <a:bodyPr wrap="none" lIns="0" rIns="0" tIns="0" bIns="0">
+            <a:spAutoFit/>
+          </a:bodyPr>
+          <a:lstStyle/>
+          <a:p>
+            <a:pPr algn="r"/>
+            <a:r>
+              <a:rPr sz="1000">
+                <a:solidFill>
+                  <a:srgbClr val="8A939B"/>
+                </a:solidFill>
+                <a:hlinkClick r:id="rId3"/>
+              </a:rPr>
+              <a:t>cuinotes.com</a:t>
+            </a:r>
+            <a:r>
+              <a:rPr sz="1000">
+                <a:solidFill>
+                  <a:srgbClr val="8A939B"/>
+                </a:solidFill>
+              </a:rPr>
+              <a:t>  ·  5</a:t>
+            </a:r>
           </a:p>
         </p:txBody>
       </p:sp>
@@ -13270,6 +12771,10 @@
           </a:solidFill>
           <a:ln/>
         </p:spPr>
+        <p:txBody>
+          <a:bodyPr/>
+          <a:p/>
+        </p:txBody>
       </p:sp>
       <p:sp>
         <p:nvSpPr>
@@ -13492,79 +12997,44 @@
       </p:sp>
       <p:sp>
         <p:nvSpPr>
-          <p:cNvPr id="7" name="Text 5"/>
-          <p:cNvSpPr txBox="1"/>
-          <p:nvPr/>
-        </p:nvSpPr>
-        <p:spPr>
-          <a:xfrm>
-            <a:off x="640080" y="6446520"/>
-            <a:ext cx="8686800" cy="292608"/>
-          </a:xfrm>
-          <a:prstGeom prst="rect">
-            <a:avLst/>
-          </a:prstGeom>
-          <a:noFill/>
-          <a:ln/>
-        </p:spPr>
-        <p:txBody>
-          <a:bodyPr wrap="square" lIns="0" tIns="0" rIns="0" bIns="0" rtlCol="0" anchor="ctr"/>
-          <a:lstStyle/>
-          <a:p>
-            <a:pPr algn="l" indent="0" marL="0">
-              <a:buNone/>
-            </a:pPr>
-            <a:r>
-              <a:rPr lang="en-US" sz="900" dirty="0">
-                <a:solidFill>
-                  <a:srgbClr val="5D5D72"/>
-                </a:solidFill>
-                <a:latin typeface="Calibri" pitchFamily="34" charset="0"/>
-                <a:ea typeface="Calibri" pitchFamily="34" charset="-122"/>
-                <a:cs typeface="Calibri" pitchFamily="34" charset="-120"/>
-              </a:rPr>
-              <a:t>Usman Akram  •  COMSATS University Islamabad</a:t>
-            </a:r>
-            <a:endParaRPr lang="en-US" sz="900" dirty="0"/>
-          </a:p>
-        </p:txBody>
-      </p:sp>
-      <p:sp>
-        <p:nvSpPr>
-          <p:cNvPr id="8" name="Text 6"/>
-          <p:cNvSpPr txBox="1"/>
-          <p:nvPr/>
-        </p:nvSpPr>
-        <p:spPr>
-          <a:xfrm>
-            <a:off x="11155680" y="6446520"/>
-            <a:ext cx="457200" cy="292608"/>
-          </a:xfrm>
-          <a:prstGeom prst="rect">
-            <a:avLst/>
-          </a:prstGeom>
-          <a:noFill/>
-          <a:ln/>
-        </p:spPr>
-        <p:txBody>
-          <a:bodyPr wrap="square" lIns="0" tIns="0" rIns="0" bIns="0" rtlCol="0" anchor="ctr"/>
-          <a:lstStyle/>
-          <a:p>
-            <a:pPr algn="r" indent="0" marL="0">
-              <a:buNone/>
-            </a:pPr>
-            <a:r>
-              <a:rPr lang="en-US" sz="900" dirty="0">
-                <a:solidFill>
-                  <a:srgbClr val="5D5D72"/>
-                </a:solidFill>
-                <a:latin typeface="Calibri" pitchFamily="34" charset="0"/>
-                <a:ea typeface="Calibri" pitchFamily="34" charset="-122"/>
-                <a:cs typeface="Calibri" pitchFamily="34" charset="-120"/>
-              </a:rPr>
-              <a:t>6</a:t>
-            </a:r>
-            <a:endParaRPr lang="en-US" sz="900" dirty="0"/>
+          <p:cNvPr id="9" name="cuinotes-footer-mark"/>
+          <p:cNvSpPr txBox="1"/>
+          <p:nvPr/>
+        </p:nvSpPr>
+        <p:spPr>
+          <a:xfrm>
+            <a:off x="9951720" y="6455664"/>
+            <a:ext cx="2011680" cy="292608"/>
+          </a:xfrm>
+          <a:prstGeom prst="rect">
+            <a:avLst/>
+          </a:prstGeom>
+          <a:noFill/>
+        </p:spPr>
+        <p:txBody>
+          <a:bodyPr wrap="none" lIns="0" rIns="0" tIns="0" bIns="0">
+            <a:spAutoFit/>
+          </a:bodyPr>
+          <a:lstStyle/>
+          <a:p>
+            <a:pPr algn="r"/>
+            <a:r>
+              <a:rPr sz="1000">
+                <a:solidFill>
+                  <a:srgbClr val="8A939B"/>
+                </a:solidFill>
+                <a:hlinkClick r:id="rId3"/>
+              </a:rPr>
+              <a:t>cuinotes.com</a:t>
+            </a:r>
+            <a:r>
+              <a:rPr sz="1000">
+                <a:solidFill>
+                  <a:srgbClr val="8A939B"/>
+                </a:solidFill>
+              </a:rPr>
+              <a:t>  ·  6</a:t>
+            </a:r>
           </a:p>
         </p:txBody>
       </p:sp>
@@ -13699,6 +13169,10 @@
           </a:solidFill>
           <a:ln/>
         </p:spPr>
+        <p:txBody>
+          <a:bodyPr/>
+          <a:p/>
+        </p:txBody>
       </p:sp>
       <p:sp>
         <p:nvSpPr>
@@ -13744,79 +13218,44 @@
       </p:sp>
       <p:sp>
         <p:nvSpPr>
-          <p:cNvPr id="6" name="Text 4"/>
-          <p:cNvSpPr txBox="1"/>
-          <p:nvPr/>
-        </p:nvSpPr>
-        <p:spPr>
-          <a:xfrm>
-            <a:off x="640080" y="6446520"/>
-            <a:ext cx="8686800" cy="292608"/>
-          </a:xfrm>
-          <a:prstGeom prst="rect">
-            <a:avLst/>
-          </a:prstGeom>
-          <a:noFill/>
-          <a:ln/>
-        </p:spPr>
-        <p:txBody>
-          <a:bodyPr wrap="square" lIns="0" tIns="0" rIns="0" bIns="0" rtlCol="0" anchor="ctr"/>
-          <a:lstStyle/>
-          <a:p>
-            <a:pPr algn="l" indent="0" marL="0">
-              <a:buNone/>
-            </a:pPr>
-            <a:r>
-              <a:rPr lang="en-US" sz="900" dirty="0">
-                <a:solidFill>
-                  <a:srgbClr val="5D5D72"/>
-                </a:solidFill>
-                <a:latin typeface="Calibri" pitchFamily="34" charset="0"/>
-                <a:ea typeface="Calibri" pitchFamily="34" charset="-122"/>
-                <a:cs typeface="Calibri" pitchFamily="34" charset="-120"/>
-              </a:rPr>
-              <a:t>Usman Akram  •  COMSATS University Islamabad</a:t>
-            </a:r>
-            <a:endParaRPr lang="en-US" sz="900" dirty="0"/>
-          </a:p>
-        </p:txBody>
-      </p:sp>
-      <p:sp>
-        <p:nvSpPr>
-          <p:cNvPr id="7" name="Text 5"/>
-          <p:cNvSpPr txBox="1"/>
-          <p:nvPr/>
-        </p:nvSpPr>
-        <p:spPr>
-          <a:xfrm>
-            <a:off x="11155680" y="6446520"/>
-            <a:ext cx="457200" cy="292608"/>
-          </a:xfrm>
-          <a:prstGeom prst="rect">
-            <a:avLst/>
-          </a:prstGeom>
-          <a:noFill/>
-          <a:ln/>
-        </p:spPr>
-        <p:txBody>
-          <a:bodyPr wrap="square" lIns="0" tIns="0" rIns="0" bIns="0" rtlCol="0" anchor="ctr"/>
-          <a:lstStyle/>
-          <a:p>
-            <a:pPr algn="r" indent="0" marL="0">
-              <a:buNone/>
-            </a:pPr>
-            <a:r>
-              <a:rPr lang="en-US" sz="900" dirty="0">
-                <a:solidFill>
-                  <a:srgbClr val="5D5D72"/>
-                </a:solidFill>
-                <a:latin typeface="Calibri" pitchFamily="34" charset="0"/>
-                <a:ea typeface="Calibri" pitchFamily="34" charset="-122"/>
-                <a:cs typeface="Calibri" pitchFamily="34" charset="-120"/>
-              </a:rPr>
-              <a:t>7</a:t>
-            </a:r>
-            <a:endParaRPr lang="en-US" sz="900" dirty="0"/>
+          <p:cNvPr id="8" name="cuinotes-footer-mark"/>
+          <p:cNvSpPr txBox="1"/>
+          <p:nvPr/>
+        </p:nvSpPr>
+        <p:spPr>
+          <a:xfrm>
+            <a:off x="9951720" y="6455664"/>
+            <a:ext cx="2011680" cy="292608"/>
+          </a:xfrm>
+          <a:prstGeom prst="rect">
+            <a:avLst/>
+          </a:prstGeom>
+          <a:noFill/>
+        </p:spPr>
+        <p:txBody>
+          <a:bodyPr wrap="none" lIns="0" rIns="0" tIns="0" bIns="0">
+            <a:spAutoFit/>
+          </a:bodyPr>
+          <a:lstStyle/>
+          <a:p>
+            <a:pPr algn="r"/>
+            <a:r>
+              <a:rPr sz="1000">
+                <a:solidFill>
+                  <a:srgbClr val="8A939B"/>
+                </a:solidFill>
+                <a:hlinkClick r:id="rId3"/>
+              </a:rPr>
+              <a:t>cuinotes.com</a:t>
+            </a:r>
+            <a:r>
+              <a:rPr sz="1000">
+                <a:solidFill>
+                  <a:srgbClr val="8A939B"/>
+                </a:solidFill>
+              </a:rPr>
+              <a:t>  ·  7</a:t>
+            </a:r>
           </a:p>
         </p:txBody>
       </p:sp>
@@ -13956,6 +13395,10 @@
             <a:prstDash val="solid"/>
           </a:ln>
         </p:spPr>
+        <p:txBody>
+          <a:bodyPr/>
+          <a:p/>
+        </p:txBody>
       </p:sp>
       <p:sp>
         <p:nvSpPr>
@@ -14037,79 +13480,44 @@
       </p:sp>
       <p:sp>
         <p:nvSpPr>
-          <p:cNvPr id="7" name="Text 5"/>
-          <p:cNvSpPr txBox="1"/>
-          <p:nvPr/>
-        </p:nvSpPr>
-        <p:spPr>
-          <a:xfrm>
-            <a:off x="640080" y="6446520"/>
-            <a:ext cx="8686800" cy="292608"/>
-          </a:xfrm>
-          <a:prstGeom prst="rect">
-            <a:avLst/>
-          </a:prstGeom>
-          <a:noFill/>
-          <a:ln/>
-        </p:spPr>
-        <p:txBody>
-          <a:bodyPr wrap="square" lIns="0" tIns="0" rIns="0" bIns="0" rtlCol="0" anchor="ctr"/>
-          <a:lstStyle/>
-          <a:p>
-            <a:pPr algn="l" indent="0" marL="0">
-              <a:buNone/>
-            </a:pPr>
-            <a:r>
-              <a:rPr lang="en-US" sz="900" dirty="0">
-                <a:solidFill>
-                  <a:srgbClr val="5D5D72"/>
-                </a:solidFill>
-                <a:latin typeface="Calibri" pitchFamily="34" charset="0"/>
-                <a:ea typeface="Calibri" pitchFamily="34" charset="-122"/>
-                <a:cs typeface="Calibri" pitchFamily="34" charset="-120"/>
-              </a:rPr>
-              <a:t>Usman Akram  •  COMSATS University Islamabad</a:t>
-            </a:r>
-            <a:endParaRPr lang="en-US" sz="900" dirty="0"/>
-          </a:p>
-        </p:txBody>
-      </p:sp>
-      <p:sp>
-        <p:nvSpPr>
-          <p:cNvPr id="8" name="Text 6"/>
-          <p:cNvSpPr txBox="1"/>
-          <p:nvPr/>
-        </p:nvSpPr>
-        <p:spPr>
-          <a:xfrm>
-            <a:off x="11155680" y="6446520"/>
-            <a:ext cx="457200" cy="292608"/>
-          </a:xfrm>
-          <a:prstGeom prst="rect">
-            <a:avLst/>
-          </a:prstGeom>
-          <a:noFill/>
-          <a:ln/>
-        </p:spPr>
-        <p:txBody>
-          <a:bodyPr wrap="square" lIns="0" tIns="0" rIns="0" bIns="0" rtlCol="0" anchor="ctr"/>
-          <a:lstStyle/>
-          <a:p>
-            <a:pPr algn="r" indent="0" marL="0">
-              <a:buNone/>
-            </a:pPr>
-            <a:r>
-              <a:rPr lang="en-US" sz="900" dirty="0">
-                <a:solidFill>
-                  <a:srgbClr val="5D5D72"/>
-                </a:solidFill>
-                <a:latin typeface="Calibri" pitchFamily="34" charset="0"/>
-                <a:ea typeface="Calibri" pitchFamily="34" charset="-122"/>
-                <a:cs typeface="Calibri" pitchFamily="34" charset="-120"/>
-              </a:rPr>
-              <a:t>8</a:t>
-            </a:r>
-            <a:endParaRPr lang="en-US" sz="900" dirty="0"/>
+          <p:cNvPr id="9" name="cuinotes-footer-mark"/>
+          <p:cNvSpPr txBox="1"/>
+          <p:nvPr/>
+        </p:nvSpPr>
+        <p:spPr>
+          <a:xfrm>
+            <a:off x="9951720" y="6455664"/>
+            <a:ext cx="2011680" cy="292608"/>
+          </a:xfrm>
+          <a:prstGeom prst="rect">
+            <a:avLst/>
+          </a:prstGeom>
+          <a:noFill/>
+        </p:spPr>
+        <p:txBody>
+          <a:bodyPr wrap="none" lIns="0" rIns="0" tIns="0" bIns="0">
+            <a:spAutoFit/>
+          </a:bodyPr>
+          <a:lstStyle/>
+          <a:p>
+            <a:pPr algn="r"/>
+            <a:r>
+              <a:rPr sz="1000">
+                <a:solidFill>
+                  <a:srgbClr val="8A939B"/>
+                </a:solidFill>
+                <a:hlinkClick r:id="rId3"/>
+              </a:rPr>
+              <a:t>cuinotes.com</a:t>
+            </a:r>
+            <a:r>
+              <a:rPr sz="1000">
+                <a:solidFill>
+                  <a:srgbClr val="8A939B"/>
+                </a:solidFill>
+              </a:rPr>
+              <a:t>  ·  8</a:t>
+            </a:r>
           </a:p>
         </p:txBody>
       </p:sp>
@@ -14244,6 +13652,10 @@
           </a:solidFill>
           <a:ln/>
         </p:spPr>
+        <p:txBody>
+          <a:bodyPr/>
+          <a:p/>
+        </p:txBody>
       </p:sp>
       <p:sp>
         <p:nvSpPr>
@@ -14489,6 +13901,10 @@
             </a:outerShdw>
           </a:effectLst>
         </p:spPr>
+        <p:txBody>
+          <a:bodyPr/>
+          <a:p/>
+        </p:txBody>
       </p:sp>
       <p:pic>
         <p:nvPicPr>
@@ -14516,79 +13932,44 @@
       </p:pic>
       <p:sp>
         <p:nvSpPr>
-          <p:cNvPr id="8" name="Text 5"/>
-          <p:cNvSpPr txBox="1"/>
-          <p:nvPr/>
-        </p:nvSpPr>
-        <p:spPr>
-          <a:xfrm>
-            <a:off x="640080" y="6446520"/>
-            <a:ext cx="8686800" cy="292608"/>
-          </a:xfrm>
-          <a:prstGeom prst="rect">
-            <a:avLst/>
-          </a:prstGeom>
-          <a:noFill/>
-          <a:ln/>
-        </p:spPr>
-        <p:txBody>
-          <a:bodyPr wrap="square" lIns="0" tIns="0" rIns="0" bIns="0" rtlCol="0" anchor="ctr"/>
-          <a:lstStyle/>
-          <a:p>
-            <a:pPr algn="l" indent="0" marL="0">
-              <a:buNone/>
-            </a:pPr>
-            <a:r>
-              <a:rPr lang="en-US" sz="900" dirty="0">
-                <a:solidFill>
-                  <a:srgbClr val="5D5D72"/>
-                </a:solidFill>
-                <a:latin typeface="Calibri" pitchFamily="34" charset="0"/>
-                <a:ea typeface="Calibri" pitchFamily="34" charset="-122"/>
-                <a:cs typeface="Calibri" pitchFamily="34" charset="-120"/>
-              </a:rPr>
-              <a:t>Usman Akram  •  COMSATS University Islamabad</a:t>
-            </a:r>
-            <a:endParaRPr lang="en-US" sz="900" dirty="0"/>
-          </a:p>
-        </p:txBody>
-      </p:sp>
-      <p:sp>
-        <p:nvSpPr>
-          <p:cNvPr id="9" name="Text 6"/>
-          <p:cNvSpPr txBox="1"/>
-          <p:nvPr/>
-        </p:nvSpPr>
-        <p:spPr>
-          <a:xfrm>
-            <a:off x="11155680" y="6446520"/>
-            <a:ext cx="457200" cy="292608"/>
-          </a:xfrm>
-          <a:prstGeom prst="rect">
-            <a:avLst/>
-          </a:prstGeom>
-          <a:noFill/>
-          <a:ln/>
-        </p:spPr>
-        <p:txBody>
-          <a:bodyPr wrap="square" lIns="0" tIns="0" rIns="0" bIns="0" rtlCol="0" anchor="ctr"/>
-          <a:lstStyle/>
-          <a:p>
-            <a:pPr algn="r" indent="0" marL="0">
-              <a:buNone/>
-            </a:pPr>
-            <a:r>
-              <a:rPr lang="en-US" sz="900" dirty="0">
-                <a:solidFill>
-                  <a:srgbClr val="5D5D72"/>
-                </a:solidFill>
-                <a:latin typeface="Calibri" pitchFamily="34" charset="0"/>
-                <a:ea typeface="Calibri" pitchFamily="34" charset="-122"/>
-                <a:cs typeface="Calibri" pitchFamily="34" charset="-120"/>
-              </a:rPr>
-              <a:t>9</a:t>
-            </a:r>
-            <a:endParaRPr lang="en-US" sz="900" dirty="0"/>
+          <p:cNvPr id="10" name="cuinotes-footer-mark"/>
+          <p:cNvSpPr txBox="1"/>
+          <p:nvPr/>
+        </p:nvSpPr>
+        <p:spPr>
+          <a:xfrm>
+            <a:off x="9951720" y="6455664"/>
+            <a:ext cx="2011680" cy="292608"/>
+          </a:xfrm>
+          <a:prstGeom prst="rect">
+            <a:avLst/>
+          </a:prstGeom>
+          <a:noFill/>
+        </p:spPr>
+        <p:txBody>
+          <a:bodyPr wrap="none" lIns="0" rIns="0" tIns="0" bIns="0">
+            <a:spAutoFit/>
+          </a:bodyPr>
+          <a:lstStyle/>
+          <a:p>
+            <a:pPr algn="r"/>
+            <a:r>
+              <a:rPr sz="1000">
+                <a:solidFill>
+                  <a:srgbClr val="8A939B"/>
+                </a:solidFill>
+                <a:hlinkClick r:id="rId4"/>
+              </a:rPr>
+              <a:t>cuinotes.com</a:t>
+            </a:r>
+            <a:r>
+              <a:rPr sz="1000">
+                <a:solidFill>
+                  <a:srgbClr val="8A939B"/>
+                </a:solidFill>
+              </a:rPr>
+              <a:t>  ·  9</a:t>
+            </a:r>
           </a:p>
         </p:txBody>
       </p:sp>

--- a/slides/CSC336-Lecture-13-DOM-Manipulation-and-Events.pptx
+++ b/slides/CSC336-Lecture-13-DOM-Manipulation-and-Events.pptx
@@ -3278,9 +3278,13 @@
             </a:avLst>
           </a:prstGeom>
           <a:solidFill>
-            <a:srgbClr val="1E1E4C"/>
+            <a:srgbClr val="F7F8F9"/>
           </a:solidFill>
-          <a:ln/>
+          <a:ln w="9525">
+            <a:solidFill>
+              <a:srgbClr val="D0D5DD"/>
+            </a:solidFill>
+          </a:ln>
         </p:spPr>
         <p:txBody>
           <a:bodyPr/>
@@ -3317,7 +3321,7 @@
             <a:r>
               <a:rPr lang="en-US" sz="1400" dirty="0">
                 <a:solidFill>
-                  <a:srgbClr val="C9D3F5"/>
+                  <a:srgbClr val="1F2429"/>
                 </a:solidFill>
                 <a:latin typeface="Courier New" pitchFamily="34" charset="0"/>
                 <a:ea typeface="Courier New" pitchFamily="34" charset="-122"/>
@@ -3337,7 +3341,7 @@
             <a:r>
               <a:rPr lang="en-US" sz="1400" dirty="0">
                 <a:solidFill>
-                  <a:srgbClr val="C9D3F5"/>
+                  <a:srgbClr val="1F2429"/>
                 </a:solidFill>
                 <a:latin typeface="Courier New" pitchFamily="34" charset="0"/>
                 <a:ea typeface="Courier New" pitchFamily="34" charset="-122"/>
@@ -3357,7 +3361,7 @@
             <a:r>
               <a:rPr lang="en-US" sz="1400" dirty="0">
                 <a:solidFill>
-                  <a:srgbClr val="C9D3F5"/>
+                  <a:srgbClr val="1F2429"/>
                 </a:solidFill>
                 <a:latin typeface="Courier New" pitchFamily="34" charset="0"/>
                 <a:ea typeface="Courier New" pitchFamily="34" charset="-122"/>
@@ -3386,7 +3390,7 @@
             <a:r>
               <a:rPr lang="en-US" sz="1400" dirty="0">
                 <a:solidFill>
-                  <a:srgbClr val="C9D3F5"/>
+                  <a:srgbClr val="1F2429"/>
                 </a:solidFill>
                 <a:latin typeface="Courier New" pitchFamily="34" charset="0"/>
                 <a:ea typeface="Courier New" pitchFamily="34" charset="-122"/>
@@ -3406,7 +3410,7 @@
             <a:r>
               <a:rPr lang="en-US" sz="1400" dirty="0">
                 <a:solidFill>
-                  <a:srgbClr val="C9D3F5"/>
+                  <a:srgbClr val="1F2429"/>
                 </a:solidFill>
                 <a:latin typeface="Courier New" pitchFamily="34" charset="0"/>
                 <a:ea typeface="Courier New" pitchFamily="34" charset="-122"/>
@@ -3426,7 +3430,7 @@
             <a:r>
               <a:rPr lang="en-US" sz="1400" dirty="0">
                 <a:solidFill>
-                  <a:srgbClr val="C9D3F5"/>
+                  <a:srgbClr val="1F2429"/>
                 </a:solidFill>
                 <a:latin typeface="Courier New" pitchFamily="34" charset="0"/>
                 <a:ea typeface="Courier New" pitchFamily="34" charset="-122"/>
@@ -3446,7 +3450,7 @@
             <a:r>
               <a:rPr lang="en-US" sz="1400" dirty="0">
                 <a:solidFill>
-                  <a:srgbClr val="C9D3F5"/>
+                  <a:srgbClr val="1F2429"/>
                 </a:solidFill>
                 <a:latin typeface="Courier New" pitchFamily="34" charset="0"/>
                 <a:ea typeface="Courier New" pitchFamily="34" charset="-122"/>
@@ -3620,7 +3624,7 @@
         <p:spPr>
           <a:xfrm>
             <a:off x="640080" y="1965960"/>
-            <a:ext cx="10911535" cy="2011680"/>
+            <a:ext cx="10911535" cy="3657600"/>
           </a:xfrm>
           <a:prstGeom prst="roundRect">
             <a:avLst>
@@ -3651,7 +3655,7 @@
         <p:spPr>
           <a:xfrm>
             <a:off x="868680" y="2103120"/>
-            <a:ext cx="10454335" cy="274320"/>
+            <a:ext cx="10454335" cy="400000"/>
           </a:xfrm>
           <a:prstGeom prst="rect">
             <a:avLst/>
@@ -3667,7 +3671,7 @@
               <a:buNone/>
             </a:pPr>
             <a:r>
-              <a:rPr lang="en-US" sz="1000" b="1" spc="200" kern="0" dirty="0">
+              <a:rPr lang="en-US" sz="1800" b="1" spc="200" kern="0" dirty="0">
                 <a:solidFill>
                   <a:srgbClr val="8A3A12"/>
                 </a:solidFill>
@@ -3677,7 +3681,7 @@
               </a:rPr>
               <a:t>WARNING</a:t>
             </a:r>
-            <a:endParaRPr lang="en-US" sz="1000" dirty="0"/>
+            <a:endParaRPr lang="en-US" sz="1800" dirty="0"/>
           </a:p>
         </p:txBody>
       </p:sp>
@@ -3689,24 +3693,24 @@
         </p:nvSpPr>
         <p:spPr>
           <a:xfrm>
-            <a:off x="868680" y="2404872"/>
-            <a:ext cx="10454335" cy="1417320"/>
-          </a:xfrm>
-          <a:prstGeom prst="rect">
-            <a:avLst/>
-          </a:prstGeom>
-          <a:noFill/>
-          <a:ln/>
-        </p:spPr>
-        <p:txBody>
-          <a:bodyPr wrap="square" lIns="0" tIns="0" rIns="0" bIns="0" rtlCol="0" anchor="t"/>
-          <a:lstStyle/>
-          <a:p>
-            <a:pPr indent="0" marL="0">
-              <a:buNone/>
-            </a:pPr>
-            <a:r>
-              <a:rPr lang="en-US" sz="1250" dirty="0">
+            <a:off x="868680" y="2795960"/>
+            <a:ext cx="10454335" cy="2800000"/>
+          </a:xfrm>
+          <a:prstGeom prst="rect">
+            <a:avLst/>
+          </a:prstGeom>
+          <a:noFill/>
+          <a:ln/>
+        </p:spPr>
+        <p:txBody>
+          <a:bodyPr wrap="square" lIns="0" tIns="0" rIns="0" bIns="0" rtlCol="0" anchor="ctr"/>
+          <a:lstStyle/>
+          <a:p>
+            <a:pPr indent="0" marL="0">
+              <a:buNone/>
+            </a:pPr>
+            <a:r>
+              <a:rPr lang="en-US" sz="2800" dirty="0">
                 <a:solidFill>
                   <a:srgbClr val="26262F"/>
                 </a:solidFill>
@@ -3716,7 +3720,7 @@
               </a:rPr>
               <a:t>innerHTML parses whatever string you give it as real HTML. If that string comes from user input and you insert it with innerHTML, a malicious user could inject a &lt;script&gt; tag -- this is Cross-Site Scripting (XSS). Prefer textContent unless you specifically need to insert markup.</a:t>
             </a:r>
-            <a:endParaRPr lang="en-US" sz="1250" dirty="0"/>
+            <a:endParaRPr lang="en-US" sz="2800" dirty="0"/>
           </a:p>
         </p:txBody>
       </p:sp>
@@ -3890,9 +3894,13 @@
             </a:avLst>
           </a:prstGeom>
           <a:solidFill>
-            <a:srgbClr val="1E1E4C"/>
+            <a:srgbClr val="F7F8F9"/>
           </a:solidFill>
-          <a:ln/>
+          <a:ln w="9525">
+            <a:solidFill>
+              <a:srgbClr val="D0D5DD"/>
+            </a:solidFill>
+          </a:ln>
         </p:spPr>
         <p:txBody>
           <a:bodyPr/>
@@ -3929,7 +3937,7 @@
             <a:r>
               <a:rPr lang="en-US" sz="1400" dirty="0">
                 <a:solidFill>
-                  <a:srgbClr val="C9D3F5"/>
+                  <a:srgbClr val="1F2429"/>
                 </a:solidFill>
                 <a:latin typeface="Courier New" pitchFamily="34" charset="0"/>
                 <a:ea typeface="Courier New" pitchFamily="34" charset="-122"/>
@@ -3949,7 +3957,7 @@
             <a:r>
               <a:rPr lang="en-US" sz="1400" dirty="0">
                 <a:solidFill>
-                  <a:srgbClr val="C9D3F5"/>
+                  <a:srgbClr val="1F2429"/>
                 </a:solidFill>
                 <a:latin typeface="Courier New" pitchFamily="34" charset="0"/>
                 <a:ea typeface="Courier New" pitchFamily="34" charset="-122"/>
@@ -3978,7 +3986,7 @@
             <a:r>
               <a:rPr lang="en-US" sz="1400" dirty="0">
                 <a:solidFill>
-                  <a:srgbClr val="C9D3F5"/>
+                  <a:srgbClr val="1F2429"/>
                 </a:solidFill>
                 <a:latin typeface="Courier New" pitchFamily="34" charset="0"/>
                 <a:ea typeface="Courier New" pitchFamily="34" charset="-122"/>
@@ -3998,7 +4006,7 @@
             <a:r>
               <a:rPr lang="en-US" sz="1400" dirty="0">
                 <a:solidFill>
-                  <a:srgbClr val="C9D3F5"/>
+                  <a:srgbClr val="1F2429"/>
                 </a:solidFill>
                 <a:latin typeface="Courier New" pitchFamily="34" charset="0"/>
                 <a:ea typeface="Courier New" pitchFamily="34" charset="-122"/>
@@ -4180,9 +4188,13 @@
             </a:avLst>
           </a:prstGeom>
           <a:solidFill>
-            <a:srgbClr val="1E1E4C"/>
+            <a:srgbClr val="F7F8F9"/>
           </a:solidFill>
-          <a:ln/>
+          <a:ln w="9525">
+            <a:solidFill>
+              <a:srgbClr val="D0D5DD"/>
+            </a:solidFill>
+          </a:ln>
         </p:spPr>
         <p:txBody>
           <a:bodyPr/>
@@ -4219,7 +4231,7 @@
             <a:r>
               <a:rPr lang="en-US" sz="1300" dirty="0">
                 <a:solidFill>
-                  <a:srgbClr val="C9D3F5"/>
+                  <a:srgbClr val="1F2429"/>
                 </a:solidFill>
                 <a:latin typeface="Courier New" pitchFamily="34" charset="0"/>
                 <a:ea typeface="Courier New" pitchFamily="34" charset="-122"/>
@@ -4239,7 +4251,7 @@
             <a:r>
               <a:rPr lang="en-US" sz="1300" dirty="0">
                 <a:solidFill>
-                  <a:srgbClr val="C9D3F5"/>
+                  <a:srgbClr val="1F2429"/>
                 </a:solidFill>
                 <a:latin typeface="Courier New" pitchFamily="34" charset="0"/>
                 <a:ea typeface="Courier New" pitchFamily="34" charset="-122"/>
@@ -4268,7 +4280,7 @@
             <a:r>
               <a:rPr lang="en-US" sz="1300" dirty="0">
                 <a:solidFill>
-                  <a:srgbClr val="C9D3F5"/>
+                  <a:srgbClr val="1F2429"/>
                 </a:solidFill>
                 <a:latin typeface="Courier New" pitchFamily="34" charset="0"/>
                 <a:ea typeface="Courier New" pitchFamily="34" charset="-122"/>
@@ -4288,7 +4300,7 @@
             <a:r>
               <a:rPr lang="en-US" sz="1300" dirty="0">
                 <a:solidFill>
-                  <a:srgbClr val="C9D3F5"/>
+                  <a:srgbClr val="1F2429"/>
                 </a:solidFill>
                 <a:latin typeface="Courier New" pitchFamily="34" charset="0"/>
                 <a:ea typeface="Courier New" pitchFamily="34" charset="-122"/>
@@ -4308,7 +4320,7 @@
             <a:r>
               <a:rPr lang="en-US" sz="1300" dirty="0">
                 <a:solidFill>
-                  <a:srgbClr val="C9D3F5"/>
+                  <a:srgbClr val="1F2429"/>
                 </a:solidFill>
                 <a:latin typeface="Courier New" pitchFamily="34" charset="0"/>
                 <a:ea typeface="Courier New" pitchFamily="34" charset="-122"/>
@@ -4328,7 +4340,7 @@
             <a:r>
               <a:rPr lang="en-US" sz="1300" dirty="0">
                 <a:solidFill>
-                  <a:srgbClr val="C9D3F5"/>
+                  <a:srgbClr val="1F2429"/>
                 </a:solidFill>
                 <a:latin typeface="Courier New" pitchFamily="34" charset="0"/>
                 <a:ea typeface="Courier New" pitchFamily="34" charset="-122"/>
@@ -4348,7 +4360,7 @@
             <a:r>
               <a:rPr lang="en-US" sz="1300" dirty="0">
                 <a:solidFill>
-                  <a:srgbClr val="C9D3F5"/>
+                  <a:srgbClr val="1F2429"/>
                 </a:solidFill>
                 <a:latin typeface="Courier New" pitchFamily="34" charset="0"/>
                 <a:ea typeface="Courier New" pitchFamily="34" charset="-122"/>
@@ -4592,9 +4604,13 @@
             </a:avLst>
           </a:prstGeom>
           <a:solidFill>
-            <a:srgbClr val="1E1E4C"/>
+            <a:srgbClr val="F7F8F9"/>
           </a:solidFill>
-          <a:ln/>
+          <a:ln w="9525">
+            <a:solidFill>
+              <a:srgbClr val="D0D5DD"/>
+            </a:solidFill>
+          </a:ln>
         </p:spPr>
         <p:txBody>
           <a:bodyPr/>
@@ -4631,7 +4647,7 @@
             <a:r>
               <a:rPr lang="en-US" sz="1400" dirty="0">
                 <a:solidFill>
-                  <a:srgbClr val="C9D3F5"/>
+                  <a:srgbClr val="1F2429"/>
                 </a:solidFill>
                 <a:latin typeface="Courier New" pitchFamily="34" charset="0"/>
                 <a:ea typeface="Courier New" pitchFamily="34" charset="-122"/>
@@ -4651,7 +4667,7 @@
             <a:r>
               <a:rPr lang="en-US" sz="1400" dirty="0">
                 <a:solidFill>
-                  <a:srgbClr val="C9D3F5"/>
+                  <a:srgbClr val="1F2429"/>
                 </a:solidFill>
                 <a:latin typeface="Courier New" pitchFamily="34" charset="0"/>
                 <a:ea typeface="Courier New" pitchFamily="34" charset="-122"/>
@@ -4671,7 +4687,7 @@
             <a:r>
               <a:rPr lang="en-US" sz="1400" dirty="0">
                 <a:solidFill>
-                  <a:srgbClr val="C9D3F5"/>
+                  <a:srgbClr val="1F2429"/>
                 </a:solidFill>
                 <a:latin typeface="Courier New" pitchFamily="34" charset="0"/>
                 <a:ea typeface="Courier New" pitchFamily="34" charset="-122"/>
@@ -4884,7 +4900,7 @@
         <p:spPr>
           <a:xfrm>
             <a:off x="640080" y="1965960"/>
-            <a:ext cx="10911535" cy="1737360"/>
+            <a:ext cx="10911535" cy="3657600"/>
           </a:xfrm>
           <a:prstGeom prst="roundRect">
             <a:avLst>
@@ -4915,7 +4931,7 @@
         <p:spPr>
           <a:xfrm>
             <a:off x="868680" y="2103120"/>
-            <a:ext cx="10454335" cy="274320"/>
+            <a:ext cx="10454335" cy="400000"/>
           </a:xfrm>
           <a:prstGeom prst="rect">
             <a:avLst/>
@@ -4931,7 +4947,7 @@
               <a:buNone/>
             </a:pPr>
             <a:r>
-              <a:rPr lang="en-US" sz="1000" b="1" spc="200" kern="0" dirty="0">
+              <a:rPr lang="en-US" sz="1800" b="1" spc="200" kern="0" dirty="0">
                 <a:solidFill>
                   <a:srgbClr val="1F7A46"/>
                 </a:solidFill>
@@ -4941,7 +4957,7 @@
               </a:rPr>
               <a:t>TIP</a:t>
             </a:r>
-            <a:endParaRPr lang="en-US" sz="1000" dirty="0"/>
+            <a:endParaRPr lang="en-US" sz="1800" dirty="0"/>
           </a:p>
         </p:txBody>
       </p:sp>
@@ -4953,24 +4969,24 @@
         </p:nvSpPr>
         <p:spPr>
           <a:xfrm>
-            <a:off x="868680" y="2404872"/>
-            <a:ext cx="10454335" cy="1143000"/>
-          </a:xfrm>
-          <a:prstGeom prst="rect">
-            <a:avLst/>
-          </a:prstGeom>
-          <a:noFill/>
-          <a:ln/>
-        </p:spPr>
-        <p:txBody>
-          <a:bodyPr wrap="square" lIns="0" tIns="0" rIns="0" bIns="0" rtlCol="0" anchor="t"/>
-          <a:lstStyle/>
-          <a:p>
-            <a:pPr indent="0" marL="0">
-              <a:buNone/>
-            </a:pPr>
-            <a:r>
-              <a:rPr lang="en-US" sz="1250" dirty="0">
+            <a:off x="868680" y="2795960"/>
+            <a:ext cx="10454335" cy="2718000"/>
+          </a:xfrm>
+          <a:prstGeom prst="rect">
+            <a:avLst/>
+          </a:prstGeom>
+          <a:noFill/>
+          <a:ln/>
+        </p:spPr>
+        <p:txBody>
+          <a:bodyPr wrap="square" lIns="0" tIns="0" rIns="0" bIns="0" rtlCol="0" anchor="ctr"/>
+          <a:lstStyle/>
+          <a:p>
+            <a:pPr indent="0" marL="0">
+              <a:buNone/>
+            </a:pPr>
+            <a:r>
+              <a:rPr lang="en-US" sz="2800" dirty="0">
                 <a:solidFill>
                   <a:srgbClr val="26262F"/>
                 </a:solidFill>
@@ -4980,7 +4996,7 @@
               </a:rPr>
               <a:t>Toggling a class keeps "what it should look like" (CSS) separate from "when it should look that way" (JavaScript), and it's easier to change the look later without touching your script.</a:t>
             </a:r>
-            <a:endParaRPr lang="en-US" sz="1250" dirty="0"/>
+            <a:endParaRPr lang="en-US" sz="2800" dirty="0"/>
           </a:p>
         </p:txBody>
       </p:sp>
@@ -5154,9 +5170,13 @@
             </a:avLst>
           </a:prstGeom>
           <a:solidFill>
-            <a:srgbClr val="1E1E4C"/>
+            <a:srgbClr val="F7F8F9"/>
           </a:solidFill>
-          <a:ln/>
+          <a:ln w="9525">
+            <a:solidFill>
+              <a:srgbClr val="D0D5DD"/>
+            </a:solidFill>
+          </a:ln>
         </p:spPr>
         <p:txBody>
           <a:bodyPr/>
@@ -5193,7 +5213,7 @@
             <a:r>
               <a:rPr lang="en-US" sz="1200" dirty="0">
                 <a:solidFill>
-                  <a:srgbClr val="C9D3F5"/>
+                  <a:srgbClr val="1F2429"/>
                 </a:solidFill>
                 <a:latin typeface="Courier New" pitchFamily="34" charset="0"/>
                 <a:ea typeface="Courier New" pitchFamily="34" charset="-122"/>
@@ -5222,7 +5242,7 @@
             <a:r>
               <a:rPr lang="en-US" sz="1200" dirty="0">
                 <a:solidFill>
-                  <a:srgbClr val="C9D3F5"/>
+                  <a:srgbClr val="1F2429"/>
                 </a:solidFill>
                 <a:latin typeface="Courier New" pitchFamily="34" charset="0"/>
                 <a:ea typeface="Courier New" pitchFamily="34" charset="-122"/>
@@ -5242,7 +5262,7 @@
             <a:r>
               <a:rPr lang="en-US" sz="1200" dirty="0">
                 <a:solidFill>
-                  <a:srgbClr val="C9D3F5"/>
+                  <a:srgbClr val="1F2429"/>
                 </a:solidFill>
                 <a:latin typeface="Courier New" pitchFamily="34" charset="0"/>
                 <a:ea typeface="Courier New" pitchFamily="34" charset="-122"/>
@@ -5262,7 +5282,7 @@
             <a:r>
               <a:rPr lang="en-US" sz="1200" dirty="0">
                 <a:solidFill>
-                  <a:srgbClr val="C9D3F5"/>
+                  <a:srgbClr val="1F2429"/>
                 </a:solidFill>
                 <a:latin typeface="Courier New" pitchFamily="34" charset="0"/>
                 <a:ea typeface="Courier New" pitchFamily="34" charset="-122"/>
@@ -5291,7 +5311,7 @@
             <a:r>
               <a:rPr lang="en-US" sz="1200" dirty="0">
                 <a:solidFill>
-                  <a:srgbClr val="C9D3F5"/>
+                  <a:srgbClr val="1F2429"/>
                 </a:solidFill>
                 <a:latin typeface="Courier New" pitchFamily="34" charset="0"/>
                 <a:ea typeface="Courier New" pitchFamily="34" charset="-122"/>
@@ -5311,7 +5331,7 @@
             <a:r>
               <a:rPr lang="en-US" sz="1200" dirty="0">
                 <a:solidFill>
-                  <a:srgbClr val="C9D3F5"/>
+                  <a:srgbClr val="1F2429"/>
                 </a:solidFill>
                 <a:latin typeface="Courier New" pitchFamily="34" charset="0"/>
                 <a:ea typeface="Courier New" pitchFamily="34" charset="-122"/>
@@ -5340,7 +5360,7 @@
             <a:r>
               <a:rPr lang="en-US" sz="1200" dirty="0">
                 <a:solidFill>
-                  <a:srgbClr val="C9D3F5"/>
+                  <a:srgbClr val="1F2429"/>
                 </a:solidFill>
                 <a:latin typeface="Courier New" pitchFamily="34" charset="0"/>
                 <a:ea typeface="Courier New" pitchFamily="34" charset="-122"/>
@@ -5360,7 +5380,7 @@
             <a:r>
               <a:rPr lang="en-US" sz="1200" dirty="0">
                 <a:solidFill>
-                  <a:srgbClr val="C9D3F5"/>
+                  <a:srgbClr val="1F2429"/>
                 </a:solidFill>
                 <a:latin typeface="Courier New" pitchFamily="34" charset="0"/>
                 <a:ea typeface="Courier New" pitchFamily="34" charset="-122"/>
@@ -5380,7 +5400,7 @@
             <a:r>
               <a:rPr lang="en-US" sz="1200" dirty="0">
                 <a:solidFill>
-                  <a:srgbClr val="C9D3F5"/>
+                  <a:srgbClr val="1F2429"/>
                 </a:solidFill>
                 <a:latin typeface="Courier New" pitchFamily="34" charset="0"/>
                 <a:ea typeface="Courier New" pitchFamily="34" charset="-122"/>
@@ -5601,9 +5621,13 @@
             </a:avLst>
           </a:prstGeom>
           <a:solidFill>
-            <a:srgbClr val="1E1E4C"/>
+            <a:srgbClr val="F7F8F9"/>
           </a:solidFill>
-          <a:ln/>
+          <a:ln w="9525">
+            <a:solidFill>
+              <a:srgbClr val="D0D5DD"/>
+            </a:solidFill>
+          </a:ln>
         </p:spPr>
         <p:txBody>
           <a:bodyPr/>
@@ -5640,7 +5664,7 @@
             <a:r>
               <a:rPr lang="en-US" sz="1400" dirty="0">
                 <a:solidFill>
-                  <a:srgbClr val="C9D3F5"/>
+                  <a:srgbClr val="1F2429"/>
                 </a:solidFill>
                 <a:latin typeface="Courier New" pitchFamily="34" charset="0"/>
                 <a:ea typeface="Courier New" pitchFamily="34" charset="-122"/>
@@ -5660,7 +5684,7 @@
             <a:r>
               <a:rPr lang="en-US" sz="1400" dirty="0">
                 <a:solidFill>
-                  <a:srgbClr val="C9D3F5"/>
+                  <a:srgbClr val="1F2429"/>
                 </a:solidFill>
                 <a:latin typeface="Courier New" pitchFamily="34" charset="0"/>
                 <a:ea typeface="Courier New" pitchFamily="34" charset="-122"/>
@@ -5680,7 +5704,7 @@
             <a:r>
               <a:rPr lang="en-US" sz="1400" dirty="0">
                 <a:solidFill>
-                  <a:srgbClr val="C9D3F5"/>
+                  <a:srgbClr val="1F2429"/>
                 </a:solidFill>
                 <a:latin typeface="Courier New" pitchFamily="34" charset="0"/>
                 <a:ea typeface="Courier New" pitchFamily="34" charset="-122"/>
@@ -5700,7 +5724,7 @@
             <a:r>
               <a:rPr lang="en-US" sz="1400" dirty="0">
                 <a:solidFill>
-                  <a:srgbClr val="C9D3F5"/>
+                  <a:srgbClr val="1F2429"/>
                 </a:solidFill>
                 <a:latin typeface="Courier New" pitchFamily="34" charset="0"/>
                 <a:ea typeface="Courier New" pitchFamily="34" charset="-122"/>
@@ -5720,7 +5744,7 @@
             <a:r>
               <a:rPr lang="en-US" sz="1400" dirty="0">
                 <a:solidFill>
-                  <a:srgbClr val="C9D3F5"/>
+                  <a:srgbClr val="1F2429"/>
                 </a:solidFill>
                 <a:latin typeface="Courier New" pitchFamily="34" charset="0"/>
                 <a:ea typeface="Courier New" pitchFamily="34" charset="-122"/>
@@ -5749,7 +5773,7 @@
             <a:r>
               <a:rPr lang="en-US" sz="1400" dirty="0">
                 <a:solidFill>
-                  <a:srgbClr val="C9D3F5"/>
+                  <a:srgbClr val="1F2429"/>
                 </a:solidFill>
                 <a:latin typeface="Courier New" pitchFamily="34" charset="0"/>
                 <a:ea typeface="Courier New" pitchFamily="34" charset="-122"/>
@@ -5769,7 +5793,7 @@
             <a:r>
               <a:rPr lang="en-US" sz="1400" dirty="0">
                 <a:solidFill>
-                  <a:srgbClr val="C9D3F5"/>
+                  <a:srgbClr val="1F2429"/>
                 </a:solidFill>
                 <a:latin typeface="Courier New" pitchFamily="34" charset="0"/>
                 <a:ea typeface="Courier New" pitchFamily="34" charset="-122"/>
@@ -5789,7 +5813,7 @@
             <a:r>
               <a:rPr lang="en-US" sz="1400" dirty="0">
                 <a:solidFill>
-                  <a:srgbClr val="C9D3F5"/>
+                  <a:srgbClr val="1F2429"/>
                 </a:solidFill>
                 <a:latin typeface="Courier New" pitchFamily="34" charset="0"/>
                 <a:ea typeface="Courier New" pitchFamily="34" charset="-122"/>
@@ -5809,7 +5833,7 @@
             <a:r>
               <a:rPr lang="en-US" sz="1400" dirty="0">
                 <a:solidFill>
-                  <a:srgbClr val="C9D3F5"/>
+                  <a:srgbClr val="1F2429"/>
                 </a:solidFill>
                 <a:latin typeface="Courier New" pitchFamily="34" charset="0"/>
                 <a:ea typeface="Courier New" pitchFamily="34" charset="-122"/>
@@ -7776,9 +7800,13 @@
             </a:avLst>
           </a:prstGeom>
           <a:solidFill>
-            <a:srgbClr val="1E1E4C"/>
+            <a:srgbClr val="F7F8F9"/>
           </a:solidFill>
-          <a:ln/>
+          <a:ln w="9525">
+            <a:solidFill>
+              <a:srgbClr val="D0D5DD"/>
+            </a:solidFill>
+          </a:ln>
         </p:spPr>
         <p:txBody>
           <a:bodyPr/>
@@ -7815,7 +7843,7 @@
             <a:r>
               <a:rPr lang="en-US" sz="1400" dirty="0">
                 <a:solidFill>
-                  <a:srgbClr val="C9D3F5"/>
+                  <a:srgbClr val="1F2429"/>
                 </a:solidFill>
                 <a:latin typeface="Courier New" pitchFamily="34" charset="0"/>
                 <a:ea typeface="Courier New" pitchFamily="34" charset="-122"/>
@@ -7844,7 +7872,7 @@
             <a:r>
               <a:rPr lang="en-US" sz="1400" dirty="0">
                 <a:solidFill>
-                  <a:srgbClr val="C9D3F5"/>
+                  <a:srgbClr val="1F2429"/>
                 </a:solidFill>
                 <a:latin typeface="Courier New" pitchFamily="34" charset="0"/>
                 <a:ea typeface="Courier New" pitchFamily="34" charset="-122"/>
@@ -7864,7 +7892,7 @@
             <a:r>
               <a:rPr lang="en-US" sz="1400" dirty="0">
                 <a:solidFill>
-                  <a:srgbClr val="C9D3F5"/>
+                  <a:srgbClr val="1F2429"/>
                 </a:solidFill>
                 <a:latin typeface="Courier New" pitchFamily="34" charset="0"/>
                 <a:ea typeface="Courier New" pitchFamily="34" charset="-122"/>
@@ -7884,7 +7912,7 @@
             <a:r>
               <a:rPr lang="en-US" sz="1400" dirty="0">
                 <a:solidFill>
-                  <a:srgbClr val="C9D3F5"/>
+                  <a:srgbClr val="1F2429"/>
                 </a:solidFill>
                 <a:latin typeface="Courier New" pitchFamily="34" charset="0"/>
                 <a:ea typeface="Courier New" pitchFamily="34" charset="-122"/>
@@ -7904,7 +7932,7 @@
             <a:r>
               <a:rPr lang="en-US" sz="1400" dirty="0">
                 <a:solidFill>
-                  <a:srgbClr val="C9D3F5"/>
+                  <a:srgbClr val="1F2429"/>
                 </a:solidFill>
                 <a:latin typeface="Courier New" pitchFamily="34" charset="0"/>
                 <a:ea typeface="Courier New" pitchFamily="34" charset="-122"/>
@@ -7924,7 +7952,7 @@
             <a:r>
               <a:rPr lang="en-US" sz="1400" dirty="0">
                 <a:solidFill>
-                  <a:srgbClr val="C9D3F5"/>
+                  <a:srgbClr val="1F2429"/>
                 </a:solidFill>
                 <a:latin typeface="Courier New" pitchFamily="34" charset="0"/>
                 <a:ea typeface="Courier New" pitchFamily="34" charset="-122"/>
@@ -7944,7 +7972,7 @@
             <a:r>
               <a:rPr lang="en-US" sz="1400" dirty="0">
                 <a:solidFill>
-                  <a:srgbClr val="C9D3F5"/>
+                  <a:srgbClr val="1F2429"/>
                 </a:solidFill>
                 <a:latin typeface="Courier New" pitchFamily="34" charset="0"/>
                 <a:ea typeface="Courier New" pitchFamily="34" charset="-122"/>
@@ -8165,9 +8193,13 @@
             </a:avLst>
           </a:prstGeom>
           <a:solidFill>
-            <a:srgbClr val="1E1E4C"/>
+            <a:srgbClr val="F7F8F9"/>
           </a:solidFill>
-          <a:ln/>
+          <a:ln w="9525">
+            <a:solidFill>
+              <a:srgbClr val="D0D5DD"/>
+            </a:solidFill>
+          </a:ln>
         </p:spPr>
         <p:txBody>
           <a:bodyPr/>
@@ -8204,7 +8236,7 @@
             <a:r>
               <a:rPr lang="en-US" sz="1300" dirty="0">
                 <a:solidFill>
-                  <a:srgbClr val="C9D3F5"/>
+                  <a:srgbClr val="1F2429"/>
                 </a:solidFill>
                 <a:latin typeface="Courier New" pitchFamily="34" charset="0"/>
                 <a:ea typeface="Courier New" pitchFamily="34" charset="-122"/>
@@ -8224,7 +8256,7 @@
             <a:r>
               <a:rPr lang="en-US" sz="1300" dirty="0">
                 <a:solidFill>
-                  <a:srgbClr val="C9D3F5"/>
+                  <a:srgbClr val="1F2429"/>
                 </a:solidFill>
                 <a:latin typeface="Courier New" pitchFamily="34" charset="0"/>
                 <a:ea typeface="Courier New" pitchFamily="34" charset="-122"/>
@@ -8244,7 +8276,7 @@
             <a:r>
               <a:rPr lang="en-US" sz="1300" dirty="0">
                 <a:solidFill>
-                  <a:srgbClr val="C9D3F5"/>
+                  <a:srgbClr val="1F2429"/>
                 </a:solidFill>
                 <a:latin typeface="Courier New" pitchFamily="34" charset="0"/>
                 <a:ea typeface="Courier New" pitchFamily="34" charset="-122"/>
@@ -8264,7 +8296,7 @@
             <a:r>
               <a:rPr lang="en-US" sz="1300" dirty="0">
                 <a:solidFill>
-                  <a:srgbClr val="C9D3F5"/>
+                  <a:srgbClr val="1F2429"/>
                 </a:solidFill>
                 <a:latin typeface="Courier New" pitchFamily="34" charset="0"/>
                 <a:ea typeface="Courier New" pitchFamily="34" charset="-122"/>
@@ -8284,7 +8316,7 @@
             <a:r>
               <a:rPr lang="en-US" sz="1300" dirty="0">
                 <a:solidFill>
-                  <a:srgbClr val="C9D3F5"/>
+                  <a:srgbClr val="1F2429"/>
                 </a:solidFill>
                 <a:latin typeface="Courier New" pitchFamily="34" charset="0"/>
                 <a:ea typeface="Courier New" pitchFamily="34" charset="-122"/>
@@ -8304,7 +8336,7 @@
             <a:r>
               <a:rPr lang="en-US" sz="1300" dirty="0">
                 <a:solidFill>
-                  <a:srgbClr val="C9D3F5"/>
+                  <a:srgbClr val="1F2429"/>
                 </a:solidFill>
                 <a:latin typeface="Courier New" pitchFamily="34" charset="0"/>
                 <a:ea typeface="Courier New" pitchFamily="34" charset="-122"/>
@@ -8324,7 +8356,7 @@
             <a:r>
               <a:rPr lang="en-US" sz="1300" dirty="0">
                 <a:solidFill>
-                  <a:srgbClr val="C9D3F5"/>
+                  <a:srgbClr val="1F2429"/>
                 </a:solidFill>
                 <a:latin typeface="Courier New" pitchFamily="34" charset="0"/>
                 <a:ea typeface="Courier New" pitchFamily="34" charset="-122"/>
@@ -8344,7 +8376,7 @@
             <a:r>
               <a:rPr lang="en-US" sz="1300" dirty="0">
                 <a:solidFill>
-                  <a:srgbClr val="C9D3F5"/>
+                  <a:srgbClr val="1F2429"/>
                 </a:solidFill>
                 <a:latin typeface="Courier New" pitchFamily="34" charset="0"/>
                 <a:ea typeface="Courier New" pitchFamily="34" charset="-122"/>
@@ -8580,7 +8612,7 @@
         <p:spPr>
           <a:xfrm>
             <a:off x="640080" y="1965960"/>
-            <a:ext cx="10911535" cy="1737360"/>
+            <a:ext cx="10911535" cy="3657600"/>
           </a:xfrm>
           <a:prstGeom prst="roundRect">
             <a:avLst>
@@ -8611,7 +8643,7 @@
         <p:spPr>
           <a:xfrm>
             <a:off x="868680" y="2103120"/>
-            <a:ext cx="10454335" cy="274320"/>
+            <a:ext cx="10454335" cy="400000"/>
           </a:xfrm>
           <a:prstGeom prst="rect">
             <a:avLst/>
@@ -8627,7 +8659,7 @@
               <a:buNone/>
             </a:pPr>
             <a:r>
-              <a:rPr lang="en-US" sz="1000" b="1" spc="200" kern="0" dirty="0">
+              <a:rPr lang="en-US" sz="1800" b="1" spc="200" kern="0" dirty="0">
                 <a:solidFill>
                   <a:srgbClr val="1F7A46"/>
                 </a:solidFill>
@@ -8637,7 +8669,7 @@
               </a:rPr>
               <a:t>TIP</a:t>
             </a:r>
-            <a:endParaRPr lang="en-US" sz="1000" dirty="0"/>
+            <a:endParaRPr lang="en-US" sz="1800" dirty="0"/>
           </a:p>
         </p:txBody>
       </p:sp>
@@ -8649,24 +8681,24 @@
         </p:nvSpPr>
         <p:spPr>
           <a:xfrm>
-            <a:off x="868680" y="2404872"/>
-            <a:ext cx="10454335" cy="1143000"/>
-          </a:xfrm>
-          <a:prstGeom prst="rect">
-            <a:avLst/>
-          </a:prstGeom>
-          <a:noFill/>
-          <a:ln/>
-        </p:spPr>
-        <p:txBody>
-          <a:bodyPr wrap="square" lIns="0" tIns="0" rIns="0" bIns="0" rtlCol="0" anchor="t"/>
-          <a:lstStyle/>
-          <a:p>
-            <a:pPr indent="0" marL="0">
-              <a:buNone/>
-            </a:pPr>
-            <a:r>
-              <a:rPr lang="en-US" sz="1250" dirty="0">
+            <a:off x="868680" y="2795960"/>
+            <a:ext cx="10454335" cy="2774000"/>
+          </a:xfrm>
+          <a:prstGeom prst="rect">
+            <a:avLst/>
+          </a:prstGeom>
+          <a:noFill/>
+          <a:ln/>
+        </p:spPr>
+        <p:txBody>
+          <a:bodyPr wrap="square" lIns="0" tIns="0" rIns="0" bIns="0" rtlCol="0" anchor="ctr"/>
+          <a:lstStyle/>
+          <a:p>
+            <a:pPr indent="0" marL="0">
+              <a:buNone/>
+            </a:pPr>
+            <a:r>
+              <a:rPr lang="en-US" sz="2800" dirty="0">
                 <a:solidFill>
                   <a:srgbClr val="26262F"/>
                 </a:solidFill>
@@ -8676,7 +8708,7 @@
               </a:rPr>
               <a:t>If you add 100 new &lt;li&gt; items after the page loads, a delegated listener on the parent &lt;ul&gt; automatically handles clicks on all of them -- no need to attach or re-attach 100 separate listeners.</a:t>
             </a:r>
-            <a:endParaRPr lang="en-US" sz="1250" dirty="0"/>
+            <a:endParaRPr lang="en-US" sz="2800" dirty="0"/>
           </a:p>
         </p:txBody>
       </p:sp>
@@ -8850,9 +8882,13 @@
             </a:avLst>
           </a:prstGeom>
           <a:solidFill>
-            <a:srgbClr val="1E1E4C"/>
+            <a:srgbClr val="F7F8F9"/>
           </a:solidFill>
-          <a:ln/>
+          <a:ln w="9525">
+            <a:solidFill>
+              <a:srgbClr val="D0D5DD"/>
+            </a:solidFill>
+          </a:ln>
         </p:spPr>
         <p:txBody>
           <a:bodyPr/>
@@ -8889,7 +8925,7 @@
             <a:r>
               <a:rPr lang="en-US" sz="1400" dirty="0">
                 <a:solidFill>
-                  <a:srgbClr val="C9D3F5"/>
+                  <a:srgbClr val="1F2429"/>
                 </a:solidFill>
                 <a:latin typeface="Courier New" pitchFamily="34" charset="0"/>
                 <a:ea typeface="Courier New" pitchFamily="34" charset="-122"/>
@@ -8909,7 +8945,7 @@
             <a:r>
               <a:rPr lang="en-US" sz="1400" dirty="0">
                 <a:solidFill>
-                  <a:srgbClr val="C9D3F5"/>
+                  <a:srgbClr val="1F2429"/>
                 </a:solidFill>
                 <a:latin typeface="Courier New" pitchFamily="34" charset="0"/>
                 <a:ea typeface="Courier New" pitchFamily="34" charset="-122"/>
@@ -8929,7 +8965,7 @@
             <a:r>
               <a:rPr lang="en-US" sz="1400" dirty="0">
                 <a:solidFill>
-                  <a:srgbClr val="C9D3F5"/>
+                  <a:srgbClr val="1F2429"/>
                 </a:solidFill>
                 <a:latin typeface="Courier New" pitchFamily="34" charset="0"/>
                 <a:ea typeface="Courier New" pitchFamily="34" charset="-122"/>
@@ -8958,7 +8994,7 @@
             <a:r>
               <a:rPr lang="en-US" sz="1400" dirty="0">
                 <a:solidFill>
-                  <a:srgbClr val="C9D3F5"/>
+                  <a:srgbClr val="1F2429"/>
                 </a:solidFill>
                 <a:latin typeface="Courier New" pitchFamily="34" charset="0"/>
                 <a:ea typeface="Courier New" pitchFamily="34" charset="-122"/>
@@ -8978,7 +9014,7 @@
             <a:r>
               <a:rPr lang="en-US" sz="1400" dirty="0">
                 <a:solidFill>
-                  <a:srgbClr val="C9D3F5"/>
+                  <a:srgbClr val="1F2429"/>
                 </a:solidFill>
                 <a:latin typeface="Courier New" pitchFamily="34" charset="0"/>
                 <a:ea typeface="Courier New" pitchFamily="34" charset="-122"/>
@@ -8998,7 +9034,7 @@
             <a:r>
               <a:rPr lang="en-US" sz="1400" dirty="0">
                 <a:solidFill>
-                  <a:srgbClr val="C9D3F5"/>
+                  <a:srgbClr val="1F2429"/>
                 </a:solidFill>
                 <a:latin typeface="Courier New" pitchFamily="34" charset="0"/>
                 <a:ea typeface="Courier New" pitchFamily="34" charset="-122"/>
@@ -9211,7 +9247,7 @@
         <p:spPr>
           <a:xfrm>
             <a:off x="640080" y="1965960"/>
-            <a:ext cx="10911535" cy="1737360"/>
+            <a:ext cx="10911535" cy="3657600"/>
           </a:xfrm>
           <a:prstGeom prst="roundRect">
             <a:avLst>
@@ -9242,7 +9278,7 @@
         <p:spPr>
           <a:xfrm>
             <a:off x="868680" y="2103120"/>
-            <a:ext cx="10454335" cy="274320"/>
+            <a:ext cx="10454335" cy="400000"/>
           </a:xfrm>
           <a:prstGeom prst="rect">
             <a:avLst/>
@@ -9258,7 +9294,7 @@
               <a:buNone/>
             </a:pPr>
             <a:r>
-              <a:rPr lang="en-US" sz="1000" b="1" spc="200" kern="0" dirty="0">
+              <a:rPr lang="en-US" sz="1800" b="1" spc="200" kern="0" dirty="0">
                 <a:solidFill>
                   <a:srgbClr val="8A3A12"/>
                 </a:solidFill>
@@ -9268,7 +9304,7 @@
               </a:rPr>
               <a:t>WARNING</a:t>
             </a:r>
-            <a:endParaRPr lang="en-US" sz="1000" dirty="0"/>
+            <a:endParaRPr lang="en-US" sz="1800" dirty="0"/>
           </a:p>
         </p:txBody>
       </p:sp>
@@ -9280,24 +9316,24 @@
         </p:nvSpPr>
         <p:spPr>
           <a:xfrm>
-            <a:off x="868680" y="2404872"/>
-            <a:ext cx="10454335" cy="1143000"/>
-          </a:xfrm>
-          <a:prstGeom prst="rect">
-            <a:avLst/>
-          </a:prstGeom>
-          <a:noFill/>
-          <a:ln/>
-        </p:spPr>
-        <p:txBody>
-          <a:bodyPr wrap="square" lIns="0" tIns="0" rIns="0" bIns="0" rtlCol="0" anchor="t"/>
-          <a:lstStyle/>
-          <a:p>
-            <a:pPr indent="0" marL="0">
-              <a:buNone/>
-            </a:pPr>
-            <a:r>
-              <a:rPr lang="en-US" sz="1250" dirty="0">
+            <a:off x="868680" y="2795960"/>
+            <a:ext cx="10454335" cy="2757200"/>
+          </a:xfrm>
+          <a:prstGeom prst="rect">
+            <a:avLst/>
+          </a:prstGeom>
+          <a:noFill/>
+          <a:ln/>
+        </p:spPr>
+        <p:txBody>
+          <a:bodyPr wrap="square" lIns="0" tIns="0" rIns="0" bIns="0" rtlCol="0" anchor="ctr"/>
+          <a:lstStyle/>
+          <a:p>
+            <a:pPr indent="0" marL="0">
+              <a:buNone/>
+            </a:pPr>
+            <a:r>
+              <a:rPr lang="en-US" sz="2800" dirty="0">
                 <a:solidFill>
                   <a:srgbClr val="26262F"/>
                 </a:solidFill>
@@ -9307,7 +9343,7 @@
               </a:rPr>
               <a:t>preventDefault() cancels what the browser would have done. stopPropagation() cancels the event from reaching other listeners further up (or down) the tree. A single handler can call both when needed.</a:t>
             </a:r>
-            <a:endParaRPr lang="en-US" sz="1250" dirty="0"/>
+            <a:endParaRPr lang="en-US" sz="2800" dirty="0"/>
           </a:p>
         </p:txBody>
       </p:sp>
@@ -10348,9 +10384,13 @@
             </a:avLst>
           </a:prstGeom>
           <a:solidFill>
-            <a:srgbClr val="1E1E4C"/>
+            <a:srgbClr val="F7F8F9"/>
           </a:solidFill>
-          <a:ln/>
+          <a:ln w="9525">
+            <a:solidFill>
+              <a:srgbClr val="D0D5DD"/>
+            </a:solidFill>
+          </a:ln>
         </p:spPr>
         <p:txBody>
           <a:bodyPr/>
@@ -10387,7 +10427,7 @@
             <a:r>
               <a:rPr lang="en-US" sz="1400" dirty="0">
                 <a:solidFill>
-                  <a:srgbClr val="C9D3F5"/>
+                  <a:srgbClr val="1F2429"/>
                 </a:solidFill>
                 <a:latin typeface="Courier New" pitchFamily="34" charset="0"/>
                 <a:ea typeface="Courier New" pitchFamily="34" charset="-122"/>
@@ -10407,7 +10447,7 @@
             <a:r>
               <a:rPr lang="en-US" sz="1400" dirty="0">
                 <a:solidFill>
-                  <a:srgbClr val="C9D3F5"/>
+                  <a:srgbClr val="1F2429"/>
                 </a:solidFill>
                 <a:latin typeface="Courier New" pitchFamily="34" charset="0"/>
                 <a:ea typeface="Courier New" pitchFamily="34" charset="-122"/>
@@ -10427,7 +10467,7 @@
             <a:r>
               <a:rPr lang="en-US" sz="1400" dirty="0">
                 <a:solidFill>
-                  <a:srgbClr val="C9D3F5"/>
+                  <a:srgbClr val="1F2429"/>
                 </a:solidFill>
                 <a:latin typeface="Courier New" pitchFamily="34" charset="0"/>
                 <a:ea typeface="Courier New" pitchFamily="34" charset="-122"/>
@@ -10447,7 +10487,7 @@
             <a:r>
               <a:rPr lang="en-US" sz="1400" dirty="0">
                 <a:solidFill>
-                  <a:srgbClr val="C9D3F5"/>
+                  <a:srgbClr val="1F2429"/>
                 </a:solidFill>
                 <a:latin typeface="Courier New" pitchFamily="34" charset="0"/>
                 <a:ea typeface="Courier New" pitchFamily="34" charset="-122"/>
@@ -10467,7 +10507,7 @@
             <a:r>
               <a:rPr lang="en-US" sz="1400" dirty="0">
                 <a:solidFill>
-                  <a:srgbClr val="C9D3F5"/>
+                  <a:srgbClr val="1F2429"/>
                 </a:solidFill>
                 <a:latin typeface="Courier New" pitchFamily="34" charset="0"/>
                 <a:ea typeface="Courier New" pitchFamily="34" charset="-122"/>
@@ -10487,7 +10527,7 @@
             <a:r>
               <a:rPr lang="en-US" sz="1400" dirty="0">
                 <a:solidFill>
-                  <a:srgbClr val="C9D3F5"/>
+                  <a:srgbClr val="1F2429"/>
                 </a:solidFill>
                 <a:latin typeface="Courier New" pitchFamily="34" charset="0"/>
                 <a:ea typeface="Courier New" pitchFamily="34" charset="-122"/>
@@ -10507,7 +10547,7 @@
             <a:r>
               <a:rPr lang="en-US" sz="1400" dirty="0">
                 <a:solidFill>
-                  <a:srgbClr val="C9D3F5"/>
+                  <a:srgbClr val="1F2429"/>
                 </a:solidFill>
                 <a:latin typeface="Courier New" pitchFamily="34" charset="0"/>
                 <a:ea typeface="Courier New" pitchFamily="34" charset="-122"/>
@@ -10527,7 +10567,7 @@
             <a:r>
               <a:rPr lang="en-US" sz="1400" dirty="0">
                 <a:solidFill>
-                  <a:srgbClr val="C9D3F5"/>
+                  <a:srgbClr val="1F2429"/>
                 </a:solidFill>
                 <a:latin typeface="Courier New" pitchFamily="34" charset="0"/>
                 <a:ea typeface="Courier New" pitchFamily="34" charset="-122"/>
@@ -10547,7 +10587,7 @@
             <a:r>
               <a:rPr lang="en-US" sz="1400" dirty="0">
                 <a:solidFill>
-                  <a:srgbClr val="C9D3F5"/>
+                  <a:srgbClr val="1F2429"/>
                 </a:solidFill>
                 <a:latin typeface="Courier New" pitchFamily="34" charset="0"/>
                 <a:ea typeface="Courier New" pitchFamily="34" charset="-122"/>
@@ -11911,9 +11951,13 @@
             </a:avLst>
           </a:prstGeom>
           <a:solidFill>
-            <a:srgbClr val="1E1E4C"/>
+            <a:srgbClr val="F7F8F9"/>
           </a:solidFill>
-          <a:ln/>
+          <a:ln w="9525">
+            <a:solidFill>
+              <a:srgbClr val="D0D5DD"/>
+            </a:solidFill>
+          </a:ln>
         </p:spPr>
         <p:txBody>
           <a:bodyPr/>
@@ -11950,7 +11994,7 @@
             <a:r>
               <a:rPr lang="en-US" sz="1400" dirty="0">
                 <a:solidFill>
-                  <a:srgbClr val="C9D3F5"/>
+                  <a:srgbClr val="1F2429"/>
                 </a:solidFill>
                 <a:latin typeface="Courier New" pitchFamily="34" charset="0"/>
                 <a:ea typeface="Courier New" pitchFamily="34" charset="-122"/>
@@ -11970,7 +12014,7 @@
             <a:r>
               <a:rPr lang="en-US" sz="1400" dirty="0">
                 <a:solidFill>
-                  <a:srgbClr val="C9D3F5"/>
+                  <a:srgbClr val="1F2429"/>
                 </a:solidFill>
                 <a:latin typeface="Courier New" pitchFamily="34" charset="0"/>
                 <a:ea typeface="Courier New" pitchFamily="34" charset="-122"/>
@@ -11990,7 +12034,7 @@
             <a:r>
               <a:rPr lang="en-US" sz="1400" dirty="0">
                 <a:solidFill>
-                  <a:srgbClr val="C9D3F5"/>
+                  <a:srgbClr val="1F2429"/>
                 </a:solidFill>
                 <a:latin typeface="Courier New" pitchFamily="34" charset="0"/>
                 <a:ea typeface="Courier New" pitchFamily="34" charset="-122"/>
@@ -12010,7 +12054,7 @@
             <a:r>
               <a:rPr lang="en-US" sz="1400" dirty="0">
                 <a:solidFill>
-                  <a:srgbClr val="C9D3F5"/>
+                  <a:srgbClr val="1F2429"/>
                 </a:solidFill>
                 <a:latin typeface="Courier New" pitchFamily="34" charset="0"/>
                 <a:ea typeface="Courier New" pitchFamily="34" charset="-122"/>
@@ -12030,7 +12074,7 @@
             <a:r>
               <a:rPr lang="en-US" sz="1400" dirty="0">
                 <a:solidFill>
-                  <a:srgbClr val="C9D3F5"/>
+                  <a:srgbClr val="1F2429"/>
                 </a:solidFill>
                 <a:latin typeface="Courier New" pitchFamily="34" charset="0"/>
                 <a:ea typeface="Courier New" pitchFamily="34" charset="-122"/>
@@ -12050,7 +12094,7 @@
             <a:r>
               <a:rPr lang="en-US" sz="1400" dirty="0">
                 <a:solidFill>
-                  <a:srgbClr val="C9D3F5"/>
+                  <a:srgbClr val="1F2429"/>
                 </a:solidFill>
                 <a:latin typeface="Courier New" pitchFamily="34" charset="0"/>
                 <a:ea typeface="Courier New" pitchFamily="34" charset="-122"/>
@@ -12070,7 +12114,7 @@
             <a:r>
               <a:rPr lang="en-US" sz="1400" dirty="0">
                 <a:solidFill>
-                  <a:srgbClr val="C9D3F5"/>
+                  <a:srgbClr val="1F2429"/>
                 </a:solidFill>
                 <a:latin typeface="Courier New" pitchFamily="34" charset="0"/>
                 <a:ea typeface="Courier New" pitchFamily="34" charset="-122"/>
@@ -12291,9 +12335,13 @@
             </a:avLst>
           </a:prstGeom>
           <a:solidFill>
-            <a:srgbClr val="1E1E4C"/>
+            <a:srgbClr val="F7F8F9"/>
           </a:solidFill>
-          <a:ln/>
+          <a:ln w="9525">
+            <a:solidFill>
+              <a:srgbClr val="D0D5DD"/>
+            </a:solidFill>
+          </a:ln>
         </p:spPr>
         <p:txBody>
           <a:bodyPr/>
@@ -12330,7 +12378,7 @@
             <a:r>
               <a:rPr lang="en-US" sz="1400" dirty="0">
                 <a:solidFill>
-                  <a:srgbClr val="C9D3F5"/>
+                  <a:srgbClr val="1F2429"/>
                 </a:solidFill>
                 <a:latin typeface="Courier New" pitchFamily="34" charset="0"/>
                 <a:ea typeface="Courier New" pitchFamily="34" charset="-122"/>
@@ -12350,7 +12398,7 @@
             <a:r>
               <a:rPr lang="en-US" sz="1400" dirty="0">
                 <a:solidFill>
-                  <a:srgbClr val="C9D3F5"/>
+                  <a:srgbClr val="1F2429"/>
                 </a:solidFill>
                 <a:latin typeface="Courier New" pitchFamily="34" charset="0"/>
                 <a:ea typeface="Courier New" pitchFamily="34" charset="-122"/>
@@ -12370,7 +12418,7 @@
             <a:r>
               <a:rPr lang="en-US" sz="1400" dirty="0">
                 <a:solidFill>
-                  <a:srgbClr val="C9D3F5"/>
+                  <a:srgbClr val="1F2429"/>
                 </a:solidFill>
                 <a:latin typeface="Courier New" pitchFamily="34" charset="0"/>
                 <a:ea typeface="Courier New" pitchFamily="34" charset="-122"/>
@@ -12390,7 +12438,7 @@
             <a:r>
               <a:rPr lang="en-US" sz="1400" dirty="0">
                 <a:solidFill>
-                  <a:srgbClr val="C9D3F5"/>
+                  <a:srgbClr val="1F2429"/>
                 </a:solidFill>
                 <a:latin typeface="Courier New" pitchFamily="34" charset="0"/>
                 <a:ea typeface="Courier New" pitchFamily="34" charset="-122"/>
@@ -12410,7 +12458,7 @@
             <a:r>
               <a:rPr lang="en-US" sz="1400" dirty="0">
                 <a:solidFill>
-                  <a:srgbClr val="C9D3F5"/>
+                  <a:srgbClr val="1F2429"/>
                 </a:solidFill>
                 <a:latin typeface="Courier New" pitchFamily="34" charset="0"/>
                 <a:ea typeface="Courier New" pitchFamily="34" charset="-122"/>
@@ -12430,7 +12478,7 @@
             <a:r>
               <a:rPr lang="en-US" sz="1400" dirty="0">
                 <a:solidFill>
-                  <a:srgbClr val="C9D3F5"/>
+                  <a:srgbClr val="1F2429"/>
                 </a:solidFill>
                 <a:latin typeface="Courier New" pitchFamily="34" charset="0"/>
                 <a:ea typeface="Courier New" pitchFamily="34" charset="-122"/>
@@ -12450,7 +12498,7 @@
             <a:r>
               <a:rPr lang="en-US" sz="1400" dirty="0">
                 <a:solidFill>
-                  <a:srgbClr val="C9D3F5"/>
+                  <a:srgbClr val="1F2429"/>
                 </a:solidFill>
                 <a:latin typeface="Courier New" pitchFamily="34" charset="0"/>
                 <a:ea typeface="Courier New" pitchFamily="34" charset="-122"/>
@@ -12470,7 +12518,7 @@
             <a:r>
               <a:rPr lang="en-US" sz="1400" dirty="0">
                 <a:solidFill>
-                  <a:srgbClr val="C9D3F5"/>
+                  <a:srgbClr val="1F2429"/>
                 </a:solidFill>
                 <a:latin typeface="Courier New" pitchFamily="34" charset="0"/>
                 <a:ea typeface="Courier New" pitchFamily="34" charset="-122"/>
@@ -12490,7 +12538,7 @@
             <a:r>
               <a:rPr lang="en-US" sz="1400" dirty="0">
                 <a:solidFill>
-                  <a:srgbClr val="C9D3F5"/>
+                  <a:srgbClr val="1F2429"/>
                 </a:solidFill>
                 <a:latin typeface="Courier New" pitchFamily="34" charset="0"/>
                 <a:ea typeface="Courier New" pitchFamily="34" charset="-122"/>
@@ -12711,9 +12759,13 @@
             </a:avLst>
           </a:prstGeom>
           <a:solidFill>
-            <a:srgbClr val="1E1E4C"/>
+            <a:srgbClr val="F7F8F9"/>
           </a:solidFill>
-          <a:ln/>
+          <a:ln w="9525">
+            <a:solidFill>
+              <a:srgbClr val="D0D5DD"/>
+            </a:solidFill>
+          </a:ln>
         </p:spPr>
         <p:txBody>
           <a:bodyPr/>
@@ -12750,7 +12802,7 @@
             <a:r>
               <a:rPr lang="en-US" sz="1400" dirty="0">
                 <a:solidFill>
-                  <a:srgbClr val="C9D3F5"/>
+                  <a:srgbClr val="1F2429"/>
                 </a:solidFill>
                 <a:latin typeface="Courier New" pitchFamily="34" charset="0"/>
                 <a:ea typeface="Courier New" pitchFamily="34" charset="-122"/>
@@ -12770,7 +12822,7 @@
             <a:r>
               <a:rPr lang="en-US" sz="1400" dirty="0">
                 <a:solidFill>
-                  <a:srgbClr val="C9D3F5"/>
+                  <a:srgbClr val="1F2429"/>
                 </a:solidFill>
                 <a:latin typeface="Courier New" pitchFamily="34" charset="0"/>
                 <a:ea typeface="Courier New" pitchFamily="34" charset="-122"/>
@@ -12790,7 +12842,7 @@
             <a:r>
               <a:rPr lang="en-US" sz="1400" dirty="0">
                 <a:solidFill>
-                  <a:srgbClr val="C9D3F5"/>
+                  <a:srgbClr val="1F2429"/>
                 </a:solidFill>
                 <a:latin typeface="Courier New" pitchFamily="34" charset="0"/>
                 <a:ea typeface="Courier New" pitchFamily="34" charset="-122"/>
@@ -12810,7 +12862,7 @@
             <a:r>
               <a:rPr lang="en-US" sz="1400" dirty="0">
                 <a:solidFill>
-                  <a:srgbClr val="C9D3F5"/>
+                  <a:srgbClr val="1F2429"/>
                 </a:solidFill>
                 <a:latin typeface="Courier New" pitchFamily="34" charset="0"/>
                 <a:ea typeface="Courier New" pitchFamily="34" charset="-122"/>
@@ -12830,7 +12882,7 @@
             <a:r>
               <a:rPr lang="en-US" sz="1400" dirty="0">
                 <a:solidFill>
-                  <a:srgbClr val="C9D3F5"/>
+                  <a:srgbClr val="1F2429"/>
                 </a:solidFill>
                 <a:latin typeface="Courier New" pitchFamily="34" charset="0"/>
                 <a:ea typeface="Courier New" pitchFamily="34" charset="-122"/>
@@ -12850,7 +12902,7 @@
             <a:r>
               <a:rPr lang="en-US" sz="1400" dirty="0">
                 <a:solidFill>
-                  <a:srgbClr val="C9D3F5"/>
+                  <a:srgbClr val="1F2429"/>
                 </a:solidFill>
                 <a:latin typeface="Courier New" pitchFamily="34" charset="0"/>
                 <a:ea typeface="Courier New" pitchFamily="34" charset="-122"/>
@@ -12870,7 +12922,7 @@
             <a:r>
               <a:rPr lang="en-US" sz="1400" dirty="0">
                 <a:solidFill>
-                  <a:srgbClr val="C9D3F5"/>
+                  <a:srgbClr val="1F2429"/>
                 </a:solidFill>
                 <a:latin typeface="Courier New" pitchFamily="34" charset="0"/>
                 <a:ea typeface="Courier New" pitchFamily="34" charset="-122"/>
@@ -13091,9 +13143,13 @@
             </a:avLst>
           </a:prstGeom>
           <a:solidFill>
-            <a:srgbClr val="1E1E4C"/>
+            <a:srgbClr val="F7F8F9"/>
           </a:solidFill>
-          <a:ln/>
+          <a:ln w="9525">
+            <a:solidFill>
+              <a:srgbClr val="D0D5DD"/>
+            </a:solidFill>
+          </a:ln>
         </p:spPr>
         <p:txBody>
           <a:bodyPr/>
@@ -13130,7 +13186,7 @@
             <a:r>
               <a:rPr lang="en-US" sz="1400" dirty="0">
                 <a:solidFill>
-                  <a:srgbClr val="C9D3F5"/>
+                  <a:srgbClr val="1F2429"/>
                 </a:solidFill>
                 <a:latin typeface="Courier New" pitchFamily="34" charset="0"/>
                 <a:ea typeface="Courier New" pitchFamily="34" charset="-122"/>
@@ -13150,7 +13206,7 @@
             <a:r>
               <a:rPr lang="en-US" sz="1400" dirty="0">
                 <a:solidFill>
-                  <a:srgbClr val="C9D3F5"/>
+                  <a:srgbClr val="1F2429"/>
                 </a:solidFill>
                 <a:latin typeface="Courier New" pitchFamily="34" charset="0"/>
                 <a:ea typeface="Courier New" pitchFamily="34" charset="-122"/>
@@ -13170,7 +13226,7 @@
             <a:r>
               <a:rPr lang="en-US" sz="1400" dirty="0">
                 <a:solidFill>
-                  <a:srgbClr val="C9D3F5"/>
+                  <a:srgbClr val="1F2429"/>
                 </a:solidFill>
                 <a:latin typeface="Courier New" pitchFamily="34" charset="0"/>
                 <a:ea typeface="Courier New" pitchFamily="34" charset="-122"/>
@@ -13190,7 +13246,7 @@
             <a:r>
               <a:rPr lang="en-US" sz="1400" dirty="0">
                 <a:solidFill>
-                  <a:srgbClr val="C9D3F5"/>
+                  <a:srgbClr val="1F2429"/>
                 </a:solidFill>
                 <a:latin typeface="Courier New" pitchFamily="34" charset="0"/>
                 <a:ea typeface="Courier New" pitchFamily="34" charset="-122"/>
@@ -13210,7 +13266,7 @@
             <a:r>
               <a:rPr lang="en-US" sz="1400" dirty="0">
                 <a:solidFill>
-                  <a:srgbClr val="C9D3F5"/>
+                  <a:srgbClr val="1F2429"/>
                 </a:solidFill>
                 <a:latin typeface="Courier New" pitchFamily="34" charset="0"/>
                 <a:ea typeface="Courier New" pitchFamily="34" charset="-122"/>
@@ -13230,7 +13286,7 @@
             <a:r>
               <a:rPr lang="en-US" sz="1400" dirty="0">
                 <a:solidFill>
-                  <a:srgbClr val="C9D3F5"/>
+                  <a:srgbClr val="1F2429"/>
                 </a:solidFill>
                 <a:latin typeface="Courier New" pitchFamily="34" charset="0"/>
                 <a:ea typeface="Courier New" pitchFamily="34" charset="-122"/>
@@ -13250,7 +13306,7 @@
             <a:r>
               <a:rPr lang="en-US" sz="1400" dirty="0">
                 <a:solidFill>
-                  <a:srgbClr val="C9D3F5"/>
+                  <a:srgbClr val="1F2429"/>
                 </a:solidFill>
                 <a:latin typeface="Courier New" pitchFamily="34" charset="0"/>
                 <a:ea typeface="Courier New" pitchFamily="34" charset="-122"/>
@@ -13270,7 +13326,7 @@
             <a:r>
               <a:rPr lang="en-US" sz="1400" dirty="0">
                 <a:solidFill>
-                  <a:srgbClr val="C9D3F5"/>
+                  <a:srgbClr val="1F2429"/>
                 </a:solidFill>
                 <a:latin typeface="Courier New" pitchFamily="34" charset="0"/>
                 <a:ea typeface="Courier New" pitchFamily="34" charset="-122"/>
@@ -13290,7 +13346,7 @@
             <a:r>
               <a:rPr lang="en-US" sz="1400" dirty="0">
                 <a:solidFill>
-                  <a:srgbClr val="C9D3F5"/>
+                  <a:srgbClr val="1F2429"/>
                 </a:solidFill>
                 <a:latin typeface="Courier New" pitchFamily="34" charset="0"/>
                 <a:ea typeface="Courier New" pitchFamily="34" charset="-122"/>
@@ -13310,7 +13366,7 @@
             <a:r>
               <a:rPr lang="en-US" sz="1400" dirty="0">
                 <a:solidFill>
-                  <a:srgbClr val="C9D3F5"/>
+                  <a:srgbClr val="1F2429"/>
                 </a:solidFill>
                 <a:latin typeface="Courier New" pitchFamily="34" charset="0"/>
                 <a:ea typeface="Courier New" pitchFamily="34" charset="-122"/>
@@ -13531,9 +13587,13 @@
             </a:avLst>
           </a:prstGeom>
           <a:solidFill>
-            <a:srgbClr val="1E1E4C"/>
+            <a:srgbClr val="F7F8F9"/>
           </a:solidFill>
-          <a:ln/>
+          <a:ln w="9525">
+            <a:solidFill>
+              <a:srgbClr val="D0D5DD"/>
+            </a:solidFill>
+          </a:ln>
         </p:spPr>
         <p:txBody>
           <a:bodyPr/>
@@ -13570,7 +13630,7 @@
             <a:r>
               <a:rPr lang="en-US" sz="1400" dirty="0">
                 <a:solidFill>
-                  <a:srgbClr val="C9D3F5"/>
+                  <a:srgbClr val="1F2429"/>
                 </a:solidFill>
                 <a:latin typeface="Courier New" pitchFamily="34" charset="0"/>
                 <a:ea typeface="Courier New" pitchFamily="34" charset="-122"/>
@@ -13590,7 +13650,7 @@
             <a:r>
               <a:rPr lang="en-US" sz="1400" dirty="0">
                 <a:solidFill>
-                  <a:srgbClr val="C9D3F5"/>
+                  <a:srgbClr val="1F2429"/>
                 </a:solidFill>
                 <a:latin typeface="Courier New" pitchFamily="34" charset="0"/>
                 <a:ea typeface="Courier New" pitchFamily="34" charset="-122"/>
@@ -13610,7 +13670,7 @@
             <a:r>
               <a:rPr lang="en-US" sz="1400" dirty="0">
                 <a:solidFill>
-                  <a:srgbClr val="C9D3F5"/>
+                  <a:srgbClr val="1F2429"/>
                 </a:solidFill>
                 <a:latin typeface="Courier New" pitchFamily="34" charset="0"/>
                 <a:ea typeface="Courier New" pitchFamily="34" charset="-122"/>
@@ -13630,7 +13690,7 @@
             <a:r>
               <a:rPr lang="en-US" sz="1400" dirty="0">
                 <a:solidFill>
-                  <a:srgbClr val="C9D3F5"/>
+                  <a:srgbClr val="1F2429"/>
                 </a:solidFill>
                 <a:latin typeface="Courier New" pitchFamily="34" charset="0"/>
                 <a:ea typeface="Courier New" pitchFamily="34" charset="-122"/>
@@ -13650,7 +13710,7 @@
             <a:r>
               <a:rPr lang="en-US" sz="1400" dirty="0">
                 <a:solidFill>
-                  <a:srgbClr val="C9D3F5"/>
+                  <a:srgbClr val="1F2429"/>
                 </a:solidFill>
                 <a:latin typeface="Courier New" pitchFamily="34" charset="0"/>
                 <a:ea typeface="Courier New" pitchFamily="34" charset="-122"/>
@@ -13670,7 +13730,7 @@
             <a:r>
               <a:rPr lang="en-US" sz="1400" dirty="0">
                 <a:solidFill>
-                  <a:srgbClr val="C9D3F5"/>
+                  <a:srgbClr val="1F2429"/>
                 </a:solidFill>
                 <a:latin typeface="Courier New" pitchFamily="34" charset="0"/>
                 <a:ea typeface="Courier New" pitchFamily="34" charset="-122"/>
@@ -13690,7 +13750,7 @@
             <a:r>
               <a:rPr lang="en-US" sz="1400" dirty="0">
                 <a:solidFill>
-                  <a:srgbClr val="C9D3F5"/>
+                  <a:srgbClr val="1F2429"/>
                 </a:solidFill>
                 <a:latin typeface="Courier New" pitchFamily="34" charset="0"/>
                 <a:ea typeface="Courier New" pitchFamily="34" charset="-122"/>
@@ -13911,9 +13971,13 @@
             </a:avLst>
           </a:prstGeom>
           <a:solidFill>
-            <a:srgbClr val="1E1E4C"/>
+            <a:srgbClr val="F7F8F9"/>
           </a:solidFill>
-          <a:ln/>
+          <a:ln w="9525">
+            <a:solidFill>
+              <a:srgbClr val="D0D5DD"/>
+            </a:solidFill>
+          </a:ln>
         </p:spPr>
         <p:txBody>
           <a:bodyPr/>
@@ -13950,7 +14014,7 @@
             <a:r>
               <a:rPr lang="en-US" sz="1400" dirty="0">
                 <a:solidFill>
-                  <a:srgbClr val="C9D3F5"/>
+                  <a:srgbClr val="1F2429"/>
                 </a:solidFill>
                 <a:latin typeface="Courier New" pitchFamily="34" charset="0"/>
                 <a:ea typeface="Courier New" pitchFamily="34" charset="-122"/>
@@ -13970,7 +14034,7 @@
             <a:r>
               <a:rPr lang="en-US" sz="1400" dirty="0">
                 <a:solidFill>
-                  <a:srgbClr val="C9D3F5"/>
+                  <a:srgbClr val="1F2429"/>
                 </a:solidFill>
                 <a:latin typeface="Courier New" pitchFamily="34" charset="0"/>
                 <a:ea typeface="Courier New" pitchFamily="34" charset="-122"/>
@@ -13990,7 +14054,7 @@
             <a:r>
               <a:rPr lang="en-US" sz="1400" dirty="0">
                 <a:solidFill>
-                  <a:srgbClr val="C9D3F5"/>
+                  <a:srgbClr val="1F2429"/>
                 </a:solidFill>
                 <a:latin typeface="Courier New" pitchFamily="34" charset="0"/>
                 <a:ea typeface="Courier New" pitchFamily="34" charset="-122"/>
@@ -14010,7 +14074,7 @@
             <a:r>
               <a:rPr lang="en-US" sz="1400" dirty="0">
                 <a:solidFill>
-                  <a:srgbClr val="C9D3F5"/>
+                  <a:srgbClr val="1F2429"/>
                 </a:solidFill>
                 <a:latin typeface="Courier New" pitchFamily="34" charset="0"/>
                 <a:ea typeface="Courier New" pitchFamily="34" charset="-122"/>
@@ -15045,7 +15109,7 @@
         <p:spPr>
           <a:xfrm>
             <a:off x="640080" y="1965960"/>
-            <a:ext cx="10911535" cy="1828800"/>
+            <a:ext cx="10911535" cy="3657600"/>
           </a:xfrm>
           <a:prstGeom prst="roundRect">
             <a:avLst>
@@ -15076,7 +15140,7 @@
         <p:spPr>
           <a:xfrm>
             <a:off x="868680" y="2103120"/>
-            <a:ext cx="10454335" cy="274320"/>
+            <a:ext cx="10454335" cy="400000"/>
           </a:xfrm>
           <a:prstGeom prst="rect">
             <a:avLst/>
@@ -15092,7 +15156,7 @@
               <a:buNone/>
             </a:pPr>
             <a:r>
-              <a:rPr lang="en-US" sz="1000" b="1" spc="200" kern="0" dirty="0">
+              <a:rPr lang="en-US" sz="1800" b="1" spc="200" kern="0" dirty="0">
                 <a:solidFill>
                   <a:srgbClr val="33459E"/>
                 </a:solidFill>
@@ -15102,7 +15166,7 @@
               </a:rPr>
               <a:t>NOTE</a:t>
             </a:r>
-            <a:endParaRPr lang="en-US" sz="1000" dirty="0"/>
+            <a:endParaRPr lang="en-US" sz="1800" dirty="0"/>
           </a:p>
         </p:txBody>
       </p:sp>
@@ -15114,24 +15178,24 @@
         </p:nvSpPr>
         <p:spPr>
           <a:xfrm>
-            <a:off x="868680" y="2404872"/>
-            <a:ext cx="10454335" cy="1234440"/>
-          </a:xfrm>
-          <a:prstGeom prst="rect">
-            <a:avLst/>
-          </a:prstGeom>
-          <a:noFill/>
-          <a:ln/>
-        </p:spPr>
-        <p:txBody>
-          <a:bodyPr wrap="square" lIns="0" tIns="0" rIns="0" bIns="0" rtlCol="0" anchor="t"/>
-          <a:lstStyle/>
-          <a:p>
-            <a:pPr indent="0" marL="0">
-              <a:buNone/>
-            </a:pPr>
-            <a:r>
-              <a:rPr lang="en-US" sz="1250" dirty="0">
+            <a:off x="868680" y="2795960"/>
+            <a:ext cx="10454335" cy="2800000"/>
+          </a:xfrm>
+          <a:prstGeom prst="rect">
+            <a:avLst/>
+          </a:prstGeom>
+          <a:noFill/>
+          <a:ln/>
+        </p:spPr>
+        <p:txBody>
+          <a:bodyPr wrap="square" lIns="0" tIns="0" rIns="0" bIns="0" rtlCol="0" anchor="ctr"/>
+          <a:lstStyle/>
+          <a:p>
+            <a:pPr indent="0" marL="0">
+              <a:buNone/>
+            </a:pPr>
+            <a:r>
+              <a:rPr lang="en-US" sz="2800" dirty="0">
                 <a:solidFill>
                   <a:srgbClr val="26262F"/>
                 </a:solidFill>
@@ -15141,7 +15205,7 @@
               </a:rPr>
               <a:t>The DOM is what the browser builds from your HTML -- and JavaScript can change it after the fact. "View Page Source" shows the original file; "Inspect Element" (DevTools) shows the CURRENT DOM, which may look very different after scripts have run.</a:t>
             </a:r>
-            <a:endParaRPr lang="en-US" sz="1250" dirty="0"/>
+            <a:endParaRPr lang="en-US" sz="2800" dirty="0"/>
           </a:p>
         </p:txBody>
       </p:sp>
@@ -15315,9 +15379,13 @@
             </a:avLst>
           </a:prstGeom>
           <a:solidFill>
-            <a:srgbClr val="1E1E4C"/>
+            <a:srgbClr val="F7F8F9"/>
           </a:solidFill>
-          <a:ln/>
+          <a:ln w="9525">
+            <a:solidFill>
+              <a:srgbClr val="D0D5DD"/>
+            </a:solidFill>
+          </a:ln>
         </p:spPr>
         <p:txBody>
           <a:bodyPr/>
@@ -15354,7 +15422,7 @@
             <a:r>
               <a:rPr lang="en-US" sz="1400" dirty="0">
                 <a:solidFill>
-                  <a:srgbClr val="C9D3F5"/>
+                  <a:srgbClr val="1F2429"/>
                 </a:solidFill>
                 <a:latin typeface="Courier New" pitchFamily="34" charset="0"/>
                 <a:ea typeface="Courier New" pitchFamily="34" charset="-122"/>
@@ -15374,7 +15442,7 @@
             <a:r>
               <a:rPr lang="en-US" sz="1400" dirty="0">
                 <a:solidFill>
-                  <a:srgbClr val="C9D3F5"/>
+                  <a:srgbClr val="1F2429"/>
                 </a:solidFill>
                 <a:latin typeface="Courier New" pitchFamily="34" charset="0"/>
                 <a:ea typeface="Courier New" pitchFamily="34" charset="-122"/>
@@ -15403,7 +15471,7 @@
             <a:r>
               <a:rPr lang="en-US" sz="1400" dirty="0">
                 <a:solidFill>
-                  <a:srgbClr val="C9D3F5"/>
+                  <a:srgbClr val="1F2429"/>
                 </a:solidFill>
                 <a:latin typeface="Courier New" pitchFamily="34" charset="0"/>
                 <a:ea typeface="Courier New" pitchFamily="34" charset="-122"/>
@@ -15423,7 +15491,7 @@
             <a:r>
               <a:rPr lang="en-US" sz="1400" dirty="0">
                 <a:solidFill>
-                  <a:srgbClr val="C9D3F5"/>
+                  <a:srgbClr val="1F2429"/>
                 </a:solidFill>
                 <a:latin typeface="Courier New" pitchFamily="34" charset="0"/>
                 <a:ea typeface="Courier New" pitchFamily="34" charset="-122"/>
@@ -15443,7 +15511,7 @@
             <a:r>
               <a:rPr lang="en-US" sz="1400" dirty="0">
                 <a:solidFill>
-                  <a:srgbClr val="C9D3F5"/>
+                  <a:srgbClr val="1F2429"/>
                 </a:solidFill>
                 <a:latin typeface="Courier New" pitchFamily="34" charset="0"/>
                 <a:ea typeface="Courier New" pitchFamily="34" charset="-122"/>
@@ -15472,7 +15540,7 @@
             <a:r>
               <a:rPr lang="en-US" sz="1400" dirty="0">
                 <a:solidFill>
-                  <a:srgbClr val="C9D3F5"/>
+                  <a:srgbClr val="1F2429"/>
                 </a:solidFill>
                 <a:latin typeface="Courier New" pitchFamily="34" charset="0"/>
                 <a:ea typeface="Courier New" pitchFamily="34" charset="-122"/>
@@ -15492,7 +15560,7 @@
             <a:r>
               <a:rPr lang="en-US" sz="1400" dirty="0">
                 <a:solidFill>
-                  <a:srgbClr val="C9D3F5"/>
+                  <a:srgbClr val="1F2429"/>
                 </a:solidFill>
                 <a:latin typeface="Courier New" pitchFamily="34" charset="0"/>
                 <a:ea typeface="Courier New" pitchFamily="34" charset="-122"/>
@@ -15713,9 +15781,13 @@
             </a:avLst>
           </a:prstGeom>
           <a:solidFill>
-            <a:srgbClr val="1E1E4C"/>
+            <a:srgbClr val="F7F8F9"/>
           </a:solidFill>
-          <a:ln/>
+          <a:ln w="9525">
+            <a:solidFill>
+              <a:srgbClr val="D0D5DD"/>
+            </a:solidFill>
+          </a:ln>
         </p:spPr>
         <p:txBody>
           <a:bodyPr/>
@@ -15752,7 +15824,7 @@
             <a:r>
               <a:rPr lang="en-US" sz="1400" dirty="0">
                 <a:solidFill>
-                  <a:srgbClr val="C9D3F5"/>
+                  <a:srgbClr val="1F2429"/>
                 </a:solidFill>
                 <a:latin typeface="Courier New" pitchFamily="34" charset="0"/>
                 <a:ea typeface="Courier New" pitchFamily="34" charset="-122"/>
@@ -15926,7 +15998,7 @@
         <p:spPr>
           <a:xfrm>
             <a:off x="640080" y="1965960"/>
-            <a:ext cx="10911535" cy="1554480"/>
+            <a:ext cx="10911535" cy="3657600"/>
           </a:xfrm>
           <a:prstGeom prst="roundRect">
             <a:avLst>
@@ -15957,7 +16029,7 @@
         <p:spPr>
           <a:xfrm>
             <a:off x="868680" y="2103120"/>
-            <a:ext cx="10454335" cy="274320"/>
+            <a:ext cx="10454335" cy="400000"/>
           </a:xfrm>
           <a:prstGeom prst="rect">
             <a:avLst/>
@@ -15973,7 +16045,7 @@
               <a:buNone/>
             </a:pPr>
             <a:r>
-              <a:rPr lang="en-US" sz="1000" b="1" spc="200" kern="0" dirty="0">
+              <a:rPr lang="en-US" sz="1800" b="1" spc="200" kern="0" dirty="0">
                 <a:solidFill>
                   <a:srgbClr val="1F7A46"/>
                 </a:solidFill>
@@ -15983,7 +16055,7 @@
               </a:rPr>
               <a:t>TIP</a:t>
             </a:r>
-            <a:endParaRPr lang="en-US" sz="1000" dirty="0"/>
+            <a:endParaRPr lang="en-US" sz="1800" dirty="0"/>
           </a:p>
         </p:txBody>
       </p:sp>
@@ -15995,24 +16067,24 @@
         </p:nvSpPr>
         <p:spPr>
           <a:xfrm>
-            <a:off x="868680" y="2404872"/>
-            <a:ext cx="10454335" cy="960120"/>
-          </a:xfrm>
-          <a:prstGeom prst="rect">
-            <a:avLst/>
-          </a:prstGeom>
-          <a:noFill/>
-          <a:ln/>
-        </p:spPr>
-        <p:txBody>
-          <a:bodyPr wrap="square" lIns="0" tIns="0" rIns="0" bIns="0" rtlCol="0" anchor="t"/>
-          <a:lstStyle/>
-          <a:p>
-            <a:pPr indent="0" marL="0">
-              <a:buNone/>
-            </a:pPr>
-            <a:r>
-              <a:rPr lang="en-US" sz="1250" dirty="0">
+            <a:off x="868680" y="2795960"/>
+            <a:ext cx="10454335" cy="2589200"/>
+          </a:xfrm>
+          <a:prstGeom prst="rect">
+            <a:avLst/>
+          </a:prstGeom>
+          <a:noFill/>
+          <a:ln/>
+        </p:spPr>
+        <p:txBody>
+          <a:bodyPr wrap="square" lIns="0" tIns="0" rIns="0" bIns="0" rtlCol="0" anchor="ctr"/>
+          <a:lstStyle/>
+          <a:p>
+            <a:pPr indent="0" marL="0">
+              <a:buNone/>
+            </a:pPr>
+            <a:r>
+              <a:rPr lang="en-US" sz="2800" dirty="0">
                 <a:solidFill>
                   <a:srgbClr val="26262F"/>
                 </a:solidFill>
@@ -16022,7 +16094,7 @@
               </a:rPr>
               <a:t>A NodeList supports forEach, but not map or filter directly. Convert it first if you need those: Array.from(allButtons) or [...allButtons].</a:t>
             </a:r>
-            <a:endParaRPr lang="en-US" sz="1250" dirty="0"/>
+            <a:endParaRPr lang="en-US" sz="2800" dirty="0"/>
           </a:p>
         </p:txBody>
       </p:sp>
@@ -16196,9 +16268,13 @@
             </a:avLst>
           </a:prstGeom>
           <a:solidFill>
-            <a:srgbClr val="1E1E4C"/>
+            <a:srgbClr val="F7F8F9"/>
           </a:solidFill>
-          <a:ln/>
+          <a:ln w="9525">
+            <a:solidFill>
+              <a:srgbClr val="D0D5DD"/>
+            </a:solidFill>
+          </a:ln>
         </p:spPr>
         <p:txBody>
           <a:bodyPr/>
@@ -16235,7 +16311,7 @@
             <a:r>
               <a:rPr lang="en-US" sz="1300" dirty="0">
                 <a:solidFill>
-                  <a:srgbClr val="C9D3F5"/>
+                  <a:srgbClr val="1F2429"/>
                 </a:solidFill>
                 <a:latin typeface="Courier New" pitchFamily="34" charset="0"/>
                 <a:ea typeface="Courier New" pitchFamily="34" charset="-122"/>
@@ -16255,7 +16331,7 @@
             <a:r>
               <a:rPr lang="en-US" sz="1300" dirty="0">
                 <a:solidFill>
-                  <a:srgbClr val="C9D3F5"/>
+                  <a:srgbClr val="1F2429"/>
                 </a:solidFill>
                 <a:latin typeface="Courier New" pitchFamily="34" charset="0"/>
                 <a:ea typeface="Courier New" pitchFamily="34" charset="-122"/>
@@ -16275,7 +16351,7 @@
             <a:r>
               <a:rPr lang="en-US" sz="1300" dirty="0">
                 <a:solidFill>
-                  <a:srgbClr val="C9D3F5"/>
+                  <a:srgbClr val="1F2429"/>
                 </a:solidFill>
                 <a:latin typeface="Courier New" pitchFamily="34" charset="0"/>
                 <a:ea typeface="Courier New" pitchFamily="34" charset="-122"/>
@@ -16304,7 +16380,7 @@
             <a:r>
               <a:rPr lang="en-US" sz="1300" dirty="0">
                 <a:solidFill>
-                  <a:srgbClr val="C9D3F5"/>
+                  <a:srgbClr val="1F2429"/>
                 </a:solidFill>
                 <a:latin typeface="Courier New" pitchFamily="34" charset="0"/>
                 <a:ea typeface="Courier New" pitchFamily="34" charset="-122"/>
@@ -16324,7 +16400,7 @@
             <a:r>
               <a:rPr lang="en-US" sz="1300" dirty="0">
                 <a:solidFill>
-                  <a:srgbClr val="C9D3F5"/>
+                  <a:srgbClr val="1F2429"/>
                 </a:solidFill>
                 <a:latin typeface="Courier New" pitchFamily="34" charset="0"/>
                 <a:ea typeface="Courier New" pitchFamily="34" charset="-122"/>
@@ -16344,7 +16420,7 @@
             <a:r>
               <a:rPr lang="en-US" sz="1300" dirty="0">
                 <a:solidFill>
-                  <a:srgbClr val="C9D3F5"/>
+                  <a:srgbClr val="1F2429"/>
                 </a:solidFill>
                 <a:latin typeface="Courier New" pitchFamily="34" charset="0"/>
                 <a:ea typeface="Courier New" pitchFamily="34" charset="-122"/>
@@ -16364,7 +16440,7 @@
             <a:r>
               <a:rPr lang="en-US" sz="1300" dirty="0">
                 <a:solidFill>
-                  <a:srgbClr val="C9D3F5"/>
+                  <a:srgbClr val="1F2429"/>
                 </a:solidFill>
                 <a:latin typeface="Courier New" pitchFamily="34" charset="0"/>
                 <a:ea typeface="Courier New" pitchFamily="34" charset="-122"/>
@@ -16384,7 +16460,7 @@
             <a:r>
               <a:rPr lang="en-US" sz="1300" dirty="0">
                 <a:solidFill>
-                  <a:srgbClr val="C9D3F5"/>
+                  <a:srgbClr val="1F2429"/>
                 </a:solidFill>
                 <a:latin typeface="Courier New" pitchFamily="34" charset="0"/>
                 <a:ea typeface="Courier New" pitchFamily="34" charset="-122"/>
@@ -16404,7 +16480,7 @@
             <a:r>
               <a:rPr lang="en-US" sz="1300" dirty="0">
                 <a:solidFill>
-                  <a:srgbClr val="C9D3F5"/>
+                  <a:srgbClr val="1F2429"/>
                 </a:solidFill>
                 <a:latin typeface="Courier New" pitchFamily="34" charset="0"/>
                 <a:ea typeface="Courier New" pitchFamily="34" charset="-122"/>
